--- a/03-Python程序设计-项目实战/V2授课PPT/W07-第13次课-给产线数据安个家.pptx
+++ b/03-Python程序设计-项目实战/V2授课PPT/W07-第13次课-给产线数据安个家.pptx
@@ -35,6 +35,9 @@
     <p:sldId id="309" r:id="rId61"/>
     <p:sldId id="311" r:id="rId63"/>
     <p:sldId id="312" r:id="rId64"/>
+    <p:sldId id="368" r:id="rId67"/>
+    <p:sldId id="369" r:id="rId66"/>
+    <p:sldId id="370" r:id="rId65"/>
     <p:sldId id="316" r:id="rId68"/>
     <p:sldId id="317" r:id="rId69"/>
     <p:sldId id="318" r:id="rId70"/>
@@ -8634,7 +8637,7 @@
                 </a:solidFill>
                 <a:latin typeface="微软雅黑"/>
               </a:rPr>
-              <a:t>10 / 60</a:t>
+              <a:t>10 / 63</a:t>
             </a:r>
           </a:p>
         </p:txBody>
@@ -9340,7 +9343,7 @@
                 </a:solidFill>
                 <a:latin typeface="微软雅黑"/>
               </a:rPr>
-              <a:t>11 / 60</a:t>
+              <a:t>11 / 63</a:t>
             </a:r>
           </a:p>
         </p:txBody>
@@ -10046,7 +10049,7 @@
                 </a:solidFill>
                 <a:latin typeface="微软雅黑"/>
               </a:rPr>
-              <a:t>12 / 60</a:t>
+              <a:t>12 / 63</a:t>
             </a:r>
           </a:p>
         </p:txBody>
@@ -10752,7 +10755,7 @@
                 </a:solidFill>
                 <a:latin typeface="微软雅黑"/>
               </a:rPr>
-              <a:t>13 / 60</a:t>
+              <a:t>13 / 63</a:t>
             </a:r>
           </a:p>
         </p:txBody>
@@ -11238,7 +11241,7 @@
                 </a:solidFill>
                 <a:latin typeface="微软雅黑"/>
               </a:rPr>
-              <a:t>14 / 60</a:t>
+              <a:t>14 / 63</a:t>
             </a:r>
           </a:p>
         </p:txBody>
@@ -12267,7 +12270,7 @@
                 </a:solidFill>
                 <a:latin typeface="微软雅黑"/>
               </a:rPr>
-              <a:t>15 / 60</a:t>
+              <a:t>15 / 63</a:t>
             </a:r>
           </a:p>
         </p:txBody>
@@ -12973,7 +12976,7 @@
                 </a:solidFill>
                 <a:latin typeface="微软雅黑"/>
               </a:rPr>
-              <a:t>16 / 60</a:t>
+              <a:t>16 / 63</a:t>
             </a:r>
           </a:p>
         </p:txBody>
@@ -13447,7 +13450,7 @@
                 </a:solidFill>
                 <a:latin typeface="微软雅黑"/>
               </a:rPr>
-              <a:t>17 / 60</a:t>
+              <a:t>17 / 63</a:t>
             </a:r>
           </a:p>
         </p:txBody>
@@ -14153,7 +14156,7 @@
                 </a:solidFill>
                 <a:latin typeface="微软雅黑"/>
               </a:rPr>
-              <a:t>18 / 60</a:t>
+              <a:t>18 / 63</a:t>
             </a:r>
           </a:p>
         </p:txBody>
@@ -15125,7 +15128,7 @@
                 </a:solidFill>
                 <a:latin typeface="微软雅黑"/>
               </a:rPr>
-              <a:t>19 / 60</a:t>
+              <a:t>19 / 63</a:t>
             </a:r>
           </a:p>
         </p:txBody>
@@ -16853,7 +16856,7 @@
                 </a:solidFill>
                 <a:latin typeface="微软雅黑"/>
               </a:rPr>
-              <a:t>2 / 60</a:t>
+              <a:t>2 / 63</a:t>
             </a:r>
           </a:p>
         </p:txBody>
@@ -17708,7 +17711,7 @@
                 </a:solidFill>
                 <a:latin typeface="微软雅黑"/>
               </a:rPr>
-              <a:t>20 / 60</a:t>
+              <a:t>20 / 63</a:t>
             </a:r>
           </a:p>
         </p:txBody>
@@ -18678,7 +18681,7 @@
                 </a:solidFill>
                 <a:latin typeface="微软雅黑"/>
               </a:rPr>
-              <a:t>21 / 60</a:t>
+              <a:t>21 / 63</a:t>
             </a:r>
           </a:p>
         </p:txBody>
@@ -19648,7 +19651,7 @@
                 </a:solidFill>
                 <a:latin typeface="微软雅黑"/>
               </a:rPr>
-              <a:t>22 / 60</a:t>
+              <a:t>22 / 63</a:t>
             </a:r>
           </a:p>
         </p:txBody>
@@ -20618,7 +20621,7 @@
                 </a:solidFill>
                 <a:latin typeface="微软雅黑"/>
               </a:rPr>
-              <a:t>23 / 60</a:t>
+              <a:t>23 / 63</a:t>
             </a:r>
           </a:p>
         </p:txBody>
@@ -21588,7 +21591,7 @@
                 </a:solidFill>
                 <a:latin typeface="微软雅黑"/>
               </a:rPr>
-              <a:t>24 / 60</a:t>
+              <a:t>24 / 63</a:t>
             </a:r>
           </a:p>
         </p:txBody>
@@ -22558,7 +22561,7 @@
                 </a:solidFill>
                 <a:latin typeface="微软雅黑"/>
               </a:rPr>
-              <a:t>25 / 60</a:t>
+              <a:t>25 / 63</a:t>
             </a:r>
           </a:p>
         </p:txBody>
@@ -23528,7 +23531,7 @@
                 </a:solidFill>
                 <a:latin typeface="微软雅黑"/>
               </a:rPr>
-              <a:t>26 / 60</a:t>
+              <a:t>26 / 63</a:t>
             </a:r>
           </a:p>
         </p:txBody>
@@ -24064,7 +24067,7 @@
                 </a:solidFill>
                 <a:latin typeface="微软雅黑"/>
               </a:rPr>
-              <a:t>27 / 60</a:t>
+              <a:t>27 / 63</a:t>
             </a:r>
           </a:p>
         </p:txBody>
@@ -25036,7 +25039,7 @@
                 </a:solidFill>
                 <a:latin typeface="微软雅黑"/>
               </a:rPr>
-              <a:t>28 / 60</a:t>
+              <a:t>28 / 63</a:t>
             </a:r>
           </a:p>
         </p:txBody>
@@ -25742,7 +25745,7 @@
                 </a:solidFill>
                 <a:latin typeface="微软雅黑"/>
               </a:rPr>
-              <a:t>29 / 60</a:t>
+              <a:t>29 / 63</a:t>
             </a:r>
           </a:p>
         </p:txBody>
@@ -26597,7 +26600,7 @@
                 </a:solidFill>
                 <a:latin typeface="微软雅黑"/>
               </a:rPr>
-              <a:t>3 / 60</a:t>
+              <a:t>3 / 63</a:t>
             </a:r>
           </a:p>
         </p:txBody>
@@ -27136,7 +27139,7 @@
                 </a:solidFill>
                 <a:latin typeface="微软雅黑"/>
               </a:rPr>
-              <a:t>30 / 60</a:t>
+              <a:t>30 / 63</a:t>
             </a:r>
           </a:p>
         </p:txBody>
@@ -27991,7 +27994,7 @@
                 </a:solidFill>
                 <a:latin typeface="微软雅黑"/>
               </a:rPr>
-              <a:t>31 / 60</a:t>
+              <a:t>34 / 63</a:t>
             </a:r>
           </a:p>
         </p:txBody>
@@ -29359,7 +29362,7 @@
                 </a:solidFill>
                 <a:latin typeface="微软雅黑"/>
               </a:rPr>
-              <a:t>32 / 60</a:t>
+              <a:t>35 / 63</a:t>
             </a:r>
           </a:p>
         </p:txBody>
@@ -30151,7 +30154,7 @@
                 </a:solidFill>
                 <a:latin typeface="微软雅黑"/>
               </a:rPr>
-              <a:t>33 / 60</a:t>
+              <a:t>36 / 63</a:t>
             </a:r>
           </a:p>
         </p:txBody>
@@ -30784,7 +30787,7 @@
                 </a:solidFill>
                 <a:latin typeface="微软雅黑"/>
               </a:rPr>
-              <a:t>34 / 60</a:t>
+              <a:t>37 / 63</a:t>
             </a:r>
           </a:p>
         </p:txBody>
@@ -31704,7 +31707,7 @@
                 </a:solidFill>
                 <a:latin typeface="微软雅黑"/>
               </a:rPr>
-              <a:t>35 / 60</a:t>
+              <a:t>38 / 63</a:t>
             </a:r>
           </a:p>
         </p:txBody>
@@ -32624,7 +32627,7 @@
                 </a:solidFill>
                 <a:latin typeface="微软雅黑"/>
               </a:rPr>
-              <a:t>36 / 60</a:t>
+              <a:t>39 / 63</a:t>
             </a:r>
           </a:p>
         </p:txBody>
@@ -33544,7 +33547,7 @@
                 </a:solidFill>
                 <a:latin typeface="微软雅黑"/>
               </a:rPr>
-              <a:t>37 / 60</a:t>
+              <a:t>40 / 63</a:t>
             </a:r>
           </a:p>
         </p:txBody>
@@ -34483,7 +34486,7 @@
                 </a:solidFill>
                 <a:latin typeface="微软雅黑"/>
               </a:rPr>
-              <a:t>38 / 60</a:t>
+              <a:t>41 / 63</a:t>
             </a:r>
           </a:p>
         </p:txBody>
@@ -35399,7 +35402,7 @@
                 </a:solidFill>
                 <a:latin typeface="微软雅黑"/>
               </a:rPr>
-              <a:t>39 / 60</a:t>
+              <a:t>42 / 63</a:t>
             </a:r>
           </a:p>
         </p:txBody>
@@ -36371,7 +36374,7 @@
                 </a:solidFill>
                 <a:latin typeface="微软雅黑"/>
               </a:rPr>
-              <a:t>4 / 60</a:t>
+              <a:t>4 / 63</a:t>
             </a:r>
           </a:p>
         </p:txBody>
@@ -37295,7 +37298,7 @@
                 </a:solidFill>
                 <a:latin typeface="微软雅黑"/>
               </a:rPr>
-              <a:t>40 / 60</a:t>
+              <a:t>43 / 63</a:t>
             </a:r>
           </a:p>
         </p:txBody>
@@ -38087,7 +38090,7 @@
                 </a:solidFill>
                 <a:latin typeface="微软雅黑"/>
               </a:rPr>
-              <a:t>41 / 60</a:t>
+              <a:t>44 / 63</a:t>
             </a:r>
           </a:p>
         </p:txBody>
@@ -38879,7 +38882,7 @@
                 </a:solidFill>
                 <a:latin typeface="微软雅黑"/>
               </a:rPr>
-              <a:t>42 / 60</a:t>
+              <a:t>45 / 63</a:t>
             </a:r>
           </a:p>
         </p:txBody>
@@ -40930,7 +40933,7 @@
                 </a:solidFill>
                 <a:latin typeface="微软雅黑"/>
               </a:rPr>
-              <a:t>44 / 60</a:t>
+              <a:t>47 / 63</a:t>
             </a:r>
           </a:p>
         </p:txBody>
@@ -41638,7 +41641,7 @@
                 </a:solidFill>
                 <a:latin typeface="微软雅黑"/>
               </a:rPr>
-              <a:t>45 / 60</a:t>
+              <a:t>48 / 63</a:t>
             </a:r>
           </a:p>
         </p:txBody>
@@ -42278,7 +42281,7 @@
                 </a:solidFill>
                 <a:latin typeface="微软雅黑"/>
               </a:rPr>
-              <a:t>46 / 60</a:t>
+              <a:t>49 / 63</a:t>
             </a:r>
           </a:p>
         </p:txBody>
@@ -42863,7 +42866,7 @@
                 </a:solidFill>
                 <a:latin typeface="微软雅黑"/>
               </a:rPr>
-              <a:t>47 / 60</a:t>
+              <a:t>50 / 63</a:t>
             </a:r>
           </a:p>
         </p:txBody>
@@ -43655,7 +43658,7 @@
                 </a:solidFill>
                 <a:latin typeface="微软雅黑"/>
               </a:rPr>
-              <a:t>48 / 60</a:t>
+              <a:t>51 / 63</a:t>
             </a:r>
           </a:p>
         </p:txBody>
@@ -45287,7 +45290,7 @@
                 </a:solidFill>
                 <a:latin typeface="微软雅黑"/>
               </a:rPr>
-              <a:t>49 / 60</a:t>
+              <a:t>52 / 63</a:t>
             </a:r>
           </a:p>
         </p:txBody>
@@ -46755,7 +46758,7 @@
                 </a:solidFill>
                 <a:latin typeface="微软雅黑"/>
               </a:rPr>
-              <a:t>5 / 60</a:t>
+              <a:t>5 / 63</a:t>
             </a:r>
           </a:p>
         </p:txBody>
@@ -47553,7 +47556,7 @@
                 </a:solidFill>
                 <a:latin typeface="微软雅黑"/>
               </a:rPr>
-              <a:t>50 / 60</a:t>
+              <a:t>53 / 63</a:t>
             </a:r>
           </a:p>
         </p:txBody>
@@ -48699,7 +48702,7 @@
                 </a:solidFill>
                 <a:latin typeface="微软雅黑"/>
               </a:rPr>
-              <a:t>51 / 60</a:t>
+              <a:t>54 / 63</a:t>
             </a:r>
           </a:p>
         </p:txBody>
@@ -49552,7 +49555,7 @@
                 </a:solidFill>
                 <a:latin typeface="微软雅黑"/>
               </a:rPr>
-              <a:t>52 / 60</a:t>
+              <a:t>55 / 63</a:t>
             </a:r>
           </a:p>
         </p:txBody>
@@ -50524,7 +50527,7 @@
                 </a:solidFill>
                 <a:latin typeface="微软雅黑"/>
               </a:rPr>
-              <a:t>53 / 60</a:t>
+              <a:t>56 / 63</a:t>
             </a:r>
           </a:p>
         </p:txBody>
@@ -51496,7 +51499,7 @@
                 </a:solidFill>
                 <a:latin typeface="微软雅黑"/>
               </a:rPr>
-              <a:t>54 / 60</a:t>
+              <a:t>57 / 63</a:t>
             </a:r>
           </a:p>
         </p:txBody>
@@ -52755,7 +52758,7 @@
                 </a:solidFill>
                 <a:latin typeface="微软雅黑"/>
               </a:rPr>
-              <a:t>55 / 60</a:t>
+              <a:t>58 / 63</a:t>
             </a:r>
           </a:p>
         </p:txBody>
@@ -53727,7 +53730,7 @@
                 </a:solidFill>
                 <a:latin typeface="微软雅黑"/>
               </a:rPr>
-              <a:t>56 / 60</a:t>
+              <a:t>59 / 63</a:t>
             </a:r>
           </a:p>
         </p:txBody>
@@ -54699,7 +54702,7 @@
                 </a:solidFill>
                 <a:latin typeface="微软雅黑"/>
               </a:rPr>
-              <a:t>57 / 60</a:t>
+              <a:t>60 / 63</a:t>
             </a:r>
           </a:p>
         </p:txBody>
@@ -55491,7 +55494,7 @@
                 </a:solidFill>
                 <a:latin typeface="微软雅黑"/>
               </a:rPr>
-              <a:t>58 / 60</a:t>
+              <a:t>61 / 63</a:t>
             </a:r>
           </a:p>
         </p:txBody>
@@ -55851,7 +55854,7 @@
                 </a:solidFill>
                 <a:latin typeface="微软雅黑"/>
               </a:rPr>
-              <a:t>59 / 60</a:t>
+              <a:t>62 / 63</a:t>
             </a:r>
           </a:p>
         </p:txBody>
@@ -56557,7 +56560,7 @@
                 </a:solidFill>
                 <a:latin typeface="微软雅黑"/>
               </a:rPr>
-              <a:t>6 / 60</a:t>
+              <a:t>6 / 63</a:t>
             </a:r>
           </a:p>
         </p:txBody>
@@ -56928,6 +56931,2849 @@
 </p:sld>
 </file>
 
+<file path=ppt/slides/slide61.xml><?xml version="1.0" encoding="utf-8"?>
+<p:sld xmlns:a="http://schemas.openxmlformats.org/drawingml/2006/main" xmlns:p="http://schemas.openxmlformats.org/presentationml/2006/main" xmlns:r="http://schemas.openxmlformats.org/officeDocument/2006/relationships">
+  <p:cSld>
+    <p:spTree>
+      <p:nvGrpSpPr>
+        <p:cNvPr id="1" name=""/>
+        <p:cNvGrpSpPr/>
+        <p:nvPr/>
+      </p:nvGrpSpPr>
+      <p:grpSpPr/>
+      <p:sp>
+        <p:nvSpPr>
+          <p:cNvPr id="2" name="Rectangle 1"/>
+          <p:cNvSpPr/>
+          <p:nvPr/>
+        </p:nvSpPr>
+        <p:spPr>
+          <a:xfrm>
+            <a:off x="0" y="0"/>
+            <a:ext cx="12192000" cy="1150000"/>
+          </a:xfrm>
+          <a:prstGeom prst="rect">
+            <a:avLst/>
+          </a:prstGeom>
+          <a:solidFill>
+            <a:srgbClr val="010328"/>
+          </a:solidFill>
+          <a:ln>
+            <a:noFill/>
+          </a:ln>
+          <a:effectLst/>
+        </p:spPr>
+        <p:style>
+          <a:lnRef idx="1">
+            <a:schemeClr val="accent1"/>
+          </a:lnRef>
+          <a:fillRef idx="3">
+            <a:schemeClr val="accent1"/>
+          </a:fillRef>
+          <a:effectRef idx="2">
+            <a:schemeClr val="accent1"/>
+          </a:effectRef>
+          <a:fontRef idx="minor">
+            <a:schemeClr val="lt1"/>
+          </a:fontRef>
+        </p:style>
+        <p:txBody>
+          <a:bodyPr rtlCol="0" anchor="ctr"/>
+          <a:lstStyle/>
+          <a:p>
+            <a:pPr algn="ctr"/>
+          </a:p>
+        </p:txBody>
+      </p:sp>
+      <p:sp>
+        <p:nvSpPr>
+          <p:cNvPr id="3" name="Rectangle 2"/>
+          <p:cNvSpPr/>
+          <p:nvPr/>
+        </p:nvSpPr>
+        <p:spPr>
+          <a:xfrm>
+            <a:off x="0" y="1150000"/>
+            <a:ext cx="2600000" cy="70000"/>
+          </a:xfrm>
+          <a:prstGeom prst="rect">
+            <a:avLst/>
+          </a:prstGeom>
+          <a:solidFill>
+            <a:srgbClr val="F5670F"/>
+          </a:solidFill>
+          <a:ln>
+            <a:noFill/>
+          </a:ln>
+          <a:effectLst/>
+        </p:spPr>
+        <p:style>
+          <a:lnRef idx="1">
+            <a:schemeClr val="accent1"/>
+          </a:lnRef>
+          <a:fillRef idx="3">
+            <a:schemeClr val="accent1"/>
+          </a:fillRef>
+          <a:effectRef idx="2">
+            <a:schemeClr val="accent1"/>
+          </a:effectRef>
+          <a:fontRef idx="minor">
+            <a:schemeClr val="lt1"/>
+          </a:fontRef>
+        </p:style>
+        <p:txBody>
+          <a:bodyPr rtlCol="0" anchor="ctr"/>
+          <a:lstStyle/>
+          <a:p>
+            <a:pPr algn="ctr"/>
+          </a:p>
+        </p:txBody>
+      </p:sp>
+      <p:sp>
+        <p:nvSpPr>
+          <p:cNvPr id="4" name="TextBox 3"/>
+          <p:cNvSpPr txBox="1"/>
+          <p:nvPr/>
+        </p:nvSpPr>
+        <p:spPr>
+          <a:xfrm>
+            <a:off x="700000" y="300000"/>
+            <a:ext cx="10792000" cy="700000"/>
+          </a:xfrm>
+          <a:prstGeom prst="rect">
+            <a:avLst/>
+          </a:prstGeom>
+          <a:noFill/>
+        </p:spPr>
+        <p:txBody>
+          <a:bodyPr wrap="square" anchor="t">
+            <a:spAutoFit/>
+          </a:bodyPr>
+          <a:lstStyle/>
+          <a:p>
+            <a:pPr algn="l">
+              <a:lnSpc>
+                <a:spcPct val="110000"/>
+              </a:lnSpc>
+              <a:spcAft>
+                <a:spcPts val="600"/>
+              </a:spcAft>
+            </a:pPr>
+            <a:r>
+              <a:rPr sz="2400" b="1">
+                <a:solidFill>
+                  <a:srgbClr val="FFFFFF"/>
+                </a:solidFill>
+                <a:latin typeface="微软雅黑"/>
+              </a:rPr>
+              <a:t>工程化代码：极简ORM·内存表+倒排索引</a:t>
+            </a:r>
+            <a:endParaRPr sz="2400" b="1">
+              <a:solidFill>
+                <a:srgbClr val="FFFFFF"/>
+              </a:solidFill>
+              <a:latin typeface="微软雅黑" panose="020B0502040204020203" charset="-122"/>
+            </a:endParaRPr>
+          </a:p>
+        </p:txBody>
+      </p:sp>
+      <p:sp>
+        <p:nvSpPr>
+          <p:cNvPr id="5" name="Rectangle 4"/>
+          <p:cNvSpPr/>
+          <p:nvPr/>
+        </p:nvSpPr>
+        <p:spPr>
+          <a:xfrm>
+            <a:off x="760000" y="1750000"/>
+            <a:ext cx="10900000" cy="4600000"/>
+          </a:xfrm>
+          <a:prstGeom prst="rect">
+            <a:avLst/>
+          </a:prstGeom>
+          <a:solidFill>
+            <a:srgbClr val="0D112A"/>
+          </a:solidFill>
+          <a:ln>
+            <a:noFill/>
+          </a:ln>
+          <a:effectLst/>
+        </p:spPr>
+        <p:style>
+          <a:lnRef idx="1">
+            <a:schemeClr val="accent1"/>
+          </a:lnRef>
+          <a:fillRef idx="3">
+            <a:schemeClr val="accent1"/>
+          </a:fillRef>
+          <a:effectRef idx="2">
+            <a:schemeClr val="accent1"/>
+          </a:effectRef>
+          <a:fontRef idx="minor">
+            <a:schemeClr val="lt1"/>
+          </a:fontRef>
+        </p:style>
+        <p:txBody>
+          <a:bodyPr rtlCol="0" anchor="ctr"/>
+          <a:lstStyle/>
+          <a:p>
+            <a:pPr algn="ctr"/>
+          </a:p>
+        </p:txBody>
+      </p:sp>
+      <p:sp>
+        <p:nvSpPr>
+          <p:cNvPr id="6" name="Rectangle 5"/>
+          <p:cNvSpPr/>
+          <p:nvPr/>
+        </p:nvSpPr>
+        <p:spPr>
+          <a:xfrm>
+            <a:off x="760000" y="1750000"/>
+            <a:ext cx="10900000" cy="120000"/>
+          </a:xfrm>
+          <a:prstGeom prst="rect">
+            <a:avLst/>
+          </a:prstGeom>
+          <a:solidFill>
+            <a:srgbClr val="F5670F"/>
+          </a:solidFill>
+          <a:ln>
+            <a:noFill/>
+          </a:ln>
+          <a:effectLst/>
+        </p:spPr>
+        <p:style>
+          <a:lnRef idx="1">
+            <a:schemeClr val="accent1"/>
+          </a:lnRef>
+          <a:fillRef idx="3">
+            <a:schemeClr val="accent1"/>
+          </a:fillRef>
+          <a:effectRef idx="2">
+            <a:schemeClr val="accent1"/>
+          </a:effectRef>
+          <a:fontRef idx="minor">
+            <a:schemeClr val="lt1"/>
+          </a:fontRef>
+        </p:style>
+        <p:txBody>
+          <a:bodyPr rtlCol="0" anchor="ctr"/>
+          <a:lstStyle/>
+          <a:p>
+            <a:pPr algn="ctr"/>
+          </a:p>
+        </p:txBody>
+      </p:sp>
+      <p:sp>
+        <p:nvSpPr>
+          <p:cNvPr id="7" name="TextBox 6"/>
+          <p:cNvSpPr txBox="1"/>
+          <p:nvPr/>
+        </p:nvSpPr>
+        <p:spPr>
+          <a:xfrm>
+            <a:off x="1000000" y="2000000"/>
+            <a:ext cx="10300000" cy="4200000"/>
+          </a:xfrm>
+          <a:prstGeom prst="rect">
+            <a:avLst/>
+          </a:prstGeom>
+          <a:noFill/>
+        </p:spPr>
+        <p:txBody>
+          <a:bodyPr wrap="square" anchor="t">
+            <a:spAutoFit/>
+          </a:bodyPr>
+          <a:lstStyle/>
+          <a:p>
+            <a:pPr algn="l">
+              <a:lnSpc>
+                <a:spcPct val="112000"/>
+              </a:lnSpc>
+              <a:spcAft>
+                <a:spcPts val="0"/>
+              </a:spcAft>
+            </a:pPr>
+            <a:r>
+              <a:rPr sz="1250" b="0">
+                <a:solidFill>
+                  <a:srgbClr val="D6DEF6"/>
+                </a:solidFill>
+                <a:latin typeface="微软雅黑"/>
+              </a:rPr>
+              <a:t># core.py —— 零依赖内存表 + 倒排索引（原理可见）</a:t>
+            </a:r>
+            <a:endParaRPr sz="1250" b="0">
+              <a:solidFill>
+                <a:srgbClr val="D6DEF6"/>
+              </a:solidFill>
+              <a:latin typeface="微软雅黑" panose="020B0502040204020203" charset="-122"/>
+            </a:endParaRPr>
+          </a:p>
+          <a:p>
+            <a:r>
+              <a:rPr sz="1250" b="0">
+                <a:solidFill>
+                  <a:srgbClr val="D6DEF6"/>
+                </a:solidFill>
+                <a:latin typeface="微软雅黑"/>
+              </a:rPr>
+              <a:t/>
+            </a:r>
+          </a:p>
+          <a:p>
+            <a:r>
+              <a:rPr sz="1250" b="0">
+                <a:solidFill>
+                  <a:srgbClr val="D6DEF6"/>
+                </a:solidFill>
+                <a:latin typeface="微软雅黑"/>
+              </a:rPr>
+              <a:t>class Table:</a:t>
+            </a:r>
+          </a:p>
+          <a:p>
+            <a:r>
+              <a:rPr sz="1250" b="0">
+                <a:solidFill>
+                  <a:srgbClr val="D6DEF6"/>
+                </a:solidFill>
+                <a:latin typeface="微软雅黑"/>
+              </a:rPr>
+              <a:t>    def __init__(self, name, fields):</a:t>
+            </a:r>
+          </a:p>
+          <a:p>
+            <a:r>
+              <a:rPr sz="1250" b="0">
+                <a:solidFill>
+                  <a:srgbClr val="D6DEF6"/>
+                </a:solidFill>
+                <a:latin typeface="微软雅黑"/>
+              </a:rPr>
+              <a:t>        if not fields: raise ValueError("未定义字段")</a:t>
+            </a:r>
+          </a:p>
+          <a:p>
+            <a:r>
+              <a:rPr sz="1250" b="0">
+                <a:solidFill>
+                  <a:srgbClr val="D6DEF6"/>
+                </a:solidFill>
+                <a:latin typeface="微软雅黑"/>
+              </a:rPr>
+              <a:t>        self.name = name; self.fields = list(fields)</a:t>
+            </a:r>
+          </a:p>
+          <a:p>
+            <a:r>
+              <a:rPr sz="1250" b="0">
+                <a:solidFill>
+                  <a:srgbClr val="D6DEF6"/>
+                </a:solidFill>
+                <a:latin typeface="微软雅黑"/>
+              </a:rPr>
+              <a:t>        self.rows = []; self.indexes = {}</a:t>
+            </a:r>
+          </a:p>
+          <a:p>
+            <a:r>
+              <a:rPr sz="1250" b="0">
+                <a:solidFill>
+                  <a:srgbClr val="D6DEF6"/>
+                </a:solidFill>
+                <a:latin typeface="微软雅黑"/>
+              </a:rPr>
+              <a:t/>
+            </a:r>
+          </a:p>
+          <a:p>
+            <a:r>
+              <a:rPr sz="1250" b="0">
+                <a:solidFill>
+                  <a:srgbClr val="D6DEF6"/>
+                </a:solidFill>
+                <a:latin typeface="微软雅黑"/>
+              </a:rPr>
+              <a:t>    def create_index(self, col):</a:t>
+            </a:r>
+          </a:p>
+          <a:p>
+            <a:r>
+              <a:rPr sz="1250" b="0">
+                <a:solidFill>
+                  <a:srgbClr val="D6DEF6"/>
+                </a:solidFill>
+                <a:latin typeface="微软雅黑"/>
+              </a:rPr>
+              <a:t>        inv = {}</a:t>
+            </a:r>
+          </a:p>
+          <a:p>
+            <a:r>
+              <a:rPr sz="1250" b="0">
+                <a:solidFill>
+                  <a:srgbClr val="D6DEF6"/>
+                </a:solidFill>
+                <a:latin typeface="微软雅黑"/>
+              </a:rPr>
+              <a:t>        for i, r in enumerate(self.rows):</a:t>
+            </a:r>
+          </a:p>
+          <a:p>
+            <a:r>
+              <a:rPr sz="1250" b="0">
+                <a:solidFill>
+                  <a:srgbClr val="D6DEF6"/>
+                </a:solidFill>
+                <a:latin typeface="微软雅黑"/>
+              </a:rPr>
+              <a:t>            inv.setdefault(r[col], set()).add(i)</a:t>
+            </a:r>
+          </a:p>
+          <a:p>
+            <a:r>
+              <a:rPr sz="1250" b="0">
+                <a:solidFill>
+                  <a:srgbClr val="D6DEF6"/>
+                </a:solidFill>
+                <a:latin typeface="微软雅黑"/>
+              </a:rPr>
+              <a:t>        self.indexes[col] = inv</a:t>
+            </a:r>
+          </a:p>
+          <a:p>
+            <a:r>
+              <a:rPr sz="1250" b="0">
+                <a:solidFill>
+                  <a:srgbClr val="D6DEF6"/>
+                </a:solidFill>
+                <a:latin typeface="微软雅黑"/>
+              </a:rPr>
+              <a:t/>
+            </a:r>
+          </a:p>
+          <a:p>
+            <a:r>
+              <a:rPr sz="1250" b="0">
+                <a:solidFill>
+                  <a:srgbClr val="D6DEF6"/>
+                </a:solidFill>
+                <a:latin typeface="微软雅黑"/>
+              </a:rPr>
+              <a:t>    def where(self, **kw):</a:t>
+            </a:r>
+          </a:p>
+          <a:p>
+            <a:r>
+              <a:rPr sz="1250" b="0">
+                <a:solidFill>
+                  <a:srgbClr val="D6DEF6"/>
+                </a:solidFill>
+                <a:latin typeface="微软雅黑"/>
+              </a:rPr>
+              <a:t>        if len(kw) == 1:</a:t>
+            </a:r>
+          </a:p>
+          <a:p>
+            <a:r>
+              <a:rPr sz="1250" b="0">
+                <a:solidFill>
+                  <a:srgbClr val="D6DEF6"/>
+                </a:solidFill>
+                <a:latin typeface="微软雅黑"/>
+              </a:rPr>
+              <a:t>            col, val = next(iter(kw.items()))</a:t>
+            </a:r>
+          </a:p>
+          <a:p>
+            <a:r>
+              <a:rPr sz="1250" b="0">
+                <a:solidFill>
+                  <a:srgbClr val="D6DEF6"/>
+                </a:solidFill>
+                <a:latin typeface="微软雅黑"/>
+              </a:rPr>
+              <a:t>            if col in self.indexes:</a:t>
+            </a:r>
+          </a:p>
+          <a:p>
+            <a:r>
+              <a:rPr sz="1250" b="0">
+                <a:solidFill>
+                  <a:srgbClr val="D6DEF6"/>
+                </a:solidFill>
+                <a:latin typeface="微软雅黑"/>
+              </a:rPr>
+              <a:t>                return [self.rows[i] for i in</a:t>
+            </a:r>
+          </a:p>
+          <a:p>
+            <a:r>
+              <a:rPr sz="1250" b="0">
+                <a:solidFill>
+                  <a:srgbClr val="D6DEF6"/>
+                </a:solidFill>
+                <a:latin typeface="微软雅黑"/>
+              </a:rPr>
+              <a:t>                        sorted(self.indexes[col].get(val, set()))]</a:t>
+            </a:r>
+          </a:p>
+          <a:p>
+            <a:r>
+              <a:rPr sz="1250" b="0">
+                <a:solidFill>
+                  <a:srgbClr val="D6DEF6"/>
+                </a:solidFill>
+                <a:latin typeface="微软雅黑"/>
+              </a:rPr>
+              <a:t>        return [r for r in self.rows</a:t>
+            </a:r>
+          </a:p>
+          <a:p>
+            <a:r>
+              <a:rPr sz="1250" b="0">
+                <a:solidFill>
+                  <a:srgbClr val="D6DEF6"/>
+                </a:solidFill>
+                <a:latin typeface="微软雅黑"/>
+              </a:rPr>
+              <a:t>                if all(r.get(k) == v for k, v in kw.items())]</a:t>
+            </a:r>
+          </a:p>
+        </p:txBody>
+      </p:sp>
+      <p:sp>
+        <p:nvSpPr>
+          <p:cNvPr id="8" name="Rectangle 7"/>
+          <p:cNvSpPr/>
+          <p:nvPr/>
+        </p:nvSpPr>
+        <p:spPr>
+          <a:xfrm>
+            <a:off x="500000" y="6500000"/>
+            <a:ext cx="11100000" cy="20000"/>
+          </a:xfrm>
+          <a:prstGeom prst="rect">
+            <a:avLst/>
+          </a:prstGeom>
+          <a:solidFill>
+            <a:srgbClr val="C9D4EE"/>
+          </a:solidFill>
+          <a:ln>
+            <a:noFill/>
+          </a:ln>
+          <a:effectLst/>
+        </p:spPr>
+        <p:style>
+          <a:lnRef idx="1">
+            <a:schemeClr val="accent1"/>
+          </a:lnRef>
+          <a:fillRef idx="3">
+            <a:schemeClr val="accent1"/>
+          </a:fillRef>
+          <a:effectRef idx="2">
+            <a:schemeClr val="accent1"/>
+          </a:effectRef>
+          <a:fontRef idx="minor">
+            <a:schemeClr val="lt1"/>
+          </a:fontRef>
+        </p:style>
+        <p:txBody>
+          <a:bodyPr rtlCol="0" anchor="ctr"/>
+          <a:lstStyle/>
+          <a:p>
+            <a:pPr algn="ctr"/>
+          </a:p>
+        </p:txBody>
+      </p:sp>
+      <p:sp>
+        <p:nvSpPr>
+          <p:cNvPr id="9" name="TextBox 8"/>
+          <p:cNvSpPr txBox="1"/>
+          <p:nvPr/>
+        </p:nvSpPr>
+        <p:spPr>
+          <a:xfrm>
+            <a:off x="500000" y="6540000"/>
+            <a:ext cx="7000000" cy="300000"/>
+          </a:xfrm>
+          <a:prstGeom prst="rect">
+            <a:avLst/>
+          </a:prstGeom>
+          <a:noFill/>
+        </p:spPr>
+        <p:txBody>
+          <a:bodyPr wrap="square" anchor="t">
+            <a:spAutoFit/>
+          </a:bodyPr>
+          <a:lstStyle/>
+          <a:p>
+            <a:pPr algn="l">
+              <a:lnSpc>
+                <a:spcPct val="110000"/>
+              </a:lnSpc>
+              <a:spcAft>
+                <a:spcPts val="600"/>
+              </a:spcAft>
+            </a:pPr>
+            <a:r>
+              <a:rPr sz="1000" b="0">
+                <a:solidFill>
+                  <a:srgbClr val="8A97B5"/>
+                </a:solidFill>
+                <a:latin typeface="微软雅黑" panose="020B0502040204020203" charset="-122"/>
+              </a:rPr>
+              <a:t>两江智造集团 · Python程序设计（项目实战）</a:t>
+            </a:r>
+            <a:endParaRPr sz="1000" b="0">
+              <a:solidFill>
+                <a:srgbClr val="8A97B5"/>
+              </a:solidFill>
+              <a:latin typeface="微软雅黑" panose="020B0502040204020203" charset="-122"/>
+            </a:endParaRPr>
+          </a:p>
+        </p:txBody>
+      </p:sp>
+      <p:sp>
+        <p:nvSpPr>
+          <p:cNvPr id="10" name="TextBox 9"/>
+          <p:cNvSpPr txBox="1"/>
+          <p:nvPr/>
+        </p:nvSpPr>
+        <p:spPr>
+          <a:xfrm>
+            <a:off x="10600000" y="6540000"/>
+            <a:ext cx="1000000" cy="300000"/>
+          </a:xfrm>
+          <a:prstGeom prst="rect">
+            <a:avLst/>
+          </a:prstGeom>
+          <a:noFill/>
+        </p:spPr>
+        <p:txBody>
+          <a:bodyPr wrap="square" anchor="t">
+            <a:spAutoFit/>
+          </a:bodyPr>
+          <a:lstStyle/>
+          <a:p>
+            <a:pPr algn="r">
+              <a:lnSpc>
+                <a:spcPct val="110000"/>
+              </a:lnSpc>
+              <a:spcAft>
+                <a:spcPts val="600"/>
+              </a:spcAft>
+            </a:pPr>
+            <a:r>
+              <a:rPr sz="1000" b="0">
+                <a:solidFill>
+                  <a:srgbClr val="8A97B5"/>
+                </a:solidFill>
+                <a:latin typeface="微软雅黑"/>
+              </a:rPr>
+              <a:t>31 / 63</a:t>
+            </a:r>
+            <a:endParaRPr sz="1000" b="0">
+              <a:solidFill>
+                <a:srgbClr val="8A97B5"/>
+              </a:solidFill>
+              <a:latin typeface="微软雅黑" panose="020B0502040204020203" charset="-122"/>
+            </a:endParaRPr>
+          </a:p>
+        </p:txBody>
+      </p:sp>
+    </p:spTree>
+  </p:cSld>
+  <p:clrMapOvr>
+    <a:masterClrMapping/>
+  </p:clrMapOvr>
+</p:sld>
+</file>
+
+<file path=ppt/slides/slide62.xml><?xml version="1.0" encoding="utf-8"?>
+<p:sld xmlns:a="http://schemas.openxmlformats.org/drawingml/2006/main" xmlns:p="http://schemas.openxmlformats.org/presentationml/2006/main" xmlns:r="http://schemas.openxmlformats.org/officeDocument/2006/relationships">
+  <p:cSld>
+    <p:spTree>
+      <p:nvGrpSpPr>
+        <p:cNvPr id="1" name=""/>
+        <p:cNvGrpSpPr/>
+        <p:nvPr/>
+      </p:nvGrpSpPr>
+      <p:grpSpPr/>
+      <p:sp>
+        <p:nvSpPr>
+          <p:cNvPr id="2" name="Rectangle 1"/>
+          <p:cNvSpPr/>
+          <p:nvPr/>
+        </p:nvSpPr>
+        <p:spPr>
+          <a:xfrm>
+            <a:off x="0" y="0"/>
+            <a:ext cx="12192000" cy="1150000"/>
+          </a:xfrm>
+          <a:prstGeom prst="rect">
+            <a:avLst/>
+          </a:prstGeom>
+          <a:solidFill>
+            <a:srgbClr val="010328"/>
+          </a:solidFill>
+          <a:ln>
+            <a:noFill/>
+          </a:ln>
+          <a:effectLst/>
+        </p:spPr>
+        <p:style>
+          <a:lnRef idx="1">
+            <a:schemeClr val="accent1"/>
+          </a:lnRef>
+          <a:fillRef idx="3">
+            <a:schemeClr val="accent1"/>
+          </a:fillRef>
+          <a:effectRef idx="2">
+            <a:schemeClr val="accent1"/>
+          </a:effectRef>
+          <a:fontRef idx="minor">
+            <a:schemeClr val="lt1"/>
+          </a:fontRef>
+        </p:style>
+        <p:txBody>
+          <a:bodyPr rtlCol="0" anchor="ctr"/>
+          <a:lstStyle/>
+          <a:p>
+            <a:pPr algn="ctr"/>
+          </a:p>
+        </p:txBody>
+      </p:sp>
+      <p:sp>
+        <p:nvSpPr>
+          <p:cNvPr id="3" name="Rectangle 2"/>
+          <p:cNvSpPr/>
+          <p:nvPr/>
+        </p:nvSpPr>
+        <p:spPr>
+          <a:xfrm>
+            <a:off x="0" y="1150000"/>
+            <a:ext cx="2600000" cy="70000"/>
+          </a:xfrm>
+          <a:prstGeom prst="rect">
+            <a:avLst/>
+          </a:prstGeom>
+          <a:solidFill>
+            <a:srgbClr val="F5670F"/>
+          </a:solidFill>
+          <a:ln>
+            <a:noFill/>
+          </a:ln>
+          <a:effectLst/>
+        </p:spPr>
+        <p:style>
+          <a:lnRef idx="1">
+            <a:schemeClr val="accent1"/>
+          </a:lnRef>
+          <a:fillRef idx="3">
+            <a:schemeClr val="accent1"/>
+          </a:fillRef>
+          <a:effectRef idx="2">
+            <a:schemeClr val="accent1"/>
+          </a:effectRef>
+          <a:fontRef idx="minor">
+            <a:schemeClr val="lt1"/>
+          </a:fontRef>
+        </p:style>
+        <p:txBody>
+          <a:bodyPr rtlCol="0" anchor="ctr"/>
+          <a:lstStyle/>
+          <a:p>
+            <a:pPr algn="ctr"/>
+          </a:p>
+        </p:txBody>
+      </p:sp>
+      <p:sp>
+        <p:nvSpPr>
+          <p:cNvPr id="4" name="TextBox 3"/>
+          <p:cNvSpPr txBox="1"/>
+          <p:nvPr/>
+        </p:nvSpPr>
+        <p:spPr>
+          <a:xfrm>
+            <a:off x="700000" y="300000"/>
+            <a:ext cx="10792000" cy="700000"/>
+          </a:xfrm>
+          <a:prstGeom prst="rect">
+            <a:avLst/>
+          </a:prstGeom>
+          <a:noFill/>
+        </p:spPr>
+        <p:txBody>
+          <a:bodyPr wrap="square" anchor="t">
+            <a:spAutoFit/>
+          </a:bodyPr>
+          <a:lstStyle/>
+          <a:p>
+            <a:pPr algn="l">
+              <a:lnSpc>
+                <a:spcPct val="110000"/>
+              </a:lnSpc>
+              <a:spcAft>
+                <a:spcPts val="600"/>
+              </a:spcAft>
+            </a:pPr>
+            <a:r>
+              <a:rPr sz="2400" b="1">
+                <a:solidFill>
+                  <a:srgbClr val="FFFFFF"/>
+                </a:solidFill>
+                <a:latin typeface="微软雅黑"/>
+              </a:rPr>
+              <a:t>工程化设计：索引抉择 —— 空间换时间</a:t>
+            </a:r>
+            <a:endParaRPr sz="2400" b="1">
+              <a:solidFill>
+                <a:srgbClr val="FFFFFF"/>
+              </a:solidFill>
+              <a:latin typeface="微软雅黑" panose="020B0502040204020203" charset="-122"/>
+            </a:endParaRPr>
+          </a:p>
+        </p:txBody>
+      </p:sp>
+      <p:sp>
+        <p:nvSpPr>
+          <p:cNvPr id="5" name="Rectangle 4"/>
+          <p:cNvSpPr/>
+          <p:nvPr/>
+        </p:nvSpPr>
+        <p:spPr>
+          <a:xfrm>
+            <a:off x="760000" y="1750000"/>
+            <a:ext cx="10900000" cy="700000"/>
+          </a:xfrm>
+          <a:prstGeom prst="rect">
+            <a:avLst/>
+          </a:prstGeom>
+          <a:solidFill>
+            <a:srgbClr val="010328"/>
+          </a:solidFill>
+          <a:ln>
+            <a:noFill/>
+          </a:ln>
+          <a:effectLst/>
+        </p:spPr>
+        <p:style>
+          <a:lnRef idx="1">
+            <a:schemeClr val="accent1"/>
+          </a:lnRef>
+          <a:fillRef idx="3">
+            <a:schemeClr val="accent1"/>
+          </a:fillRef>
+          <a:effectRef idx="2">
+            <a:schemeClr val="accent1"/>
+          </a:effectRef>
+          <a:fontRef idx="minor">
+            <a:schemeClr val="lt1"/>
+          </a:fontRef>
+        </p:style>
+        <p:txBody>
+          <a:bodyPr rtlCol="0" anchor="ctr"/>
+          <a:lstStyle/>
+          <a:p>
+            <a:pPr algn="ctr"/>
+          </a:p>
+        </p:txBody>
+      </p:sp>
+      <p:sp>
+        <p:nvSpPr>
+          <p:cNvPr id="6" name="TextBox 5"/>
+          <p:cNvSpPr txBox="1"/>
+          <p:nvPr/>
+        </p:nvSpPr>
+        <p:spPr>
+          <a:xfrm>
+            <a:off x="1000000" y="1830000"/>
+            <a:ext cx="10300000" cy="540000"/>
+          </a:xfrm>
+          <a:prstGeom prst="rect">
+            <a:avLst/>
+          </a:prstGeom>
+          <a:noFill/>
+        </p:spPr>
+        <p:txBody>
+          <a:bodyPr wrap="square" anchor="t">
+            <a:spAutoFit/>
+          </a:bodyPr>
+          <a:lstStyle/>
+          <a:p>
+            <a:pPr algn="l">
+              <a:lnSpc>
+                <a:spcPct val="110000"/>
+              </a:lnSpc>
+              <a:spcAft>
+                <a:spcPts val="600"/>
+              </a:spcAft>
+            </a:pPr>
+            <a:r>
+              <a:rPr sz="2000" b="1">
+                <a:solidFill>
+                  <a:srgbClr val="FFFFFF"/>
+                </a:solidFill>
+                <a:latin typeface="微软雅黑"/>
+              </a:rPr>
+              <a:t>B侧 · 索引与EXPLAIN · 数据访问方式</a:t>
+            </a:r>
+            <a:endParaRPr sz="2000" b="1">
+              <a:solidFill>
+                <a:srgbClr val="FFFFFF"/>
+              </a:solidFill>
+              <a:latin typeface="微软雅黑" panose="020B0502040204020203" charset="-122"/>
+            </a:endParaRPr>
+          </a:p>
+        </p:txBody>
+      </p:sp>
+      <p:sp>
+        <p:nvSpPr>
+          <p:cNvPr id="7" name="Rectangle 6"/>
+          <p:cNvSpPr/>
+          <p:nvPr/>
+        </p:nvSpPr>
+        <p:spPr>
+          <a:xfrm>
+            <a:off x="760000" y="2650000"/>
+            <a:ext cx="5300000" cy="1500000"/>
+          </a:xfrm>
+          <a:prstGeom prst="rect">
+            <a:avLst/>
+          </a:prstGeom>
+          <a:solidFill>
+            <a:srgbClr val="F3F6FD"/>
+          </a:solidFill>
+          <a:ln>
+            <a:solidFill>
+              <a:srgbClr val="0545E8"/>
+            </a:solidFill>
+          </a:ln>
+          <a:effectLst/>
+        </p:spPr>
+        <p:style>
+          <a:lnRef idx="1">
+            <a:schemeClr val="accent1"/>
+          </a:lnRef>
+          <a:fillRef idx="3">
+            <a:schemeClr val="accent1"/>
+          </a:fillRef>
+          <a:effectRef idx="2">
+            <a:schemeClr val="accent1"/>
+          </a:effectRef>
+          <a:fontRef idx="minor">
+            <a:schemeClr val="lt1"/>
+          </a:fontRef>
+        </p:style>
+        <p:txBody>
+          <a:bodyPr rtlCol="0" anchor="ctr"/>
+          <a:lstStyle/>
+          <a:p>
+            <a:pPr algn="ctr"/>
+          </a:p>
+        </p:txBody>
+      </p:sp>
+      <p:sp>
+        <p:nvSpPr>
+          <p:cNvPr id="8" name="Rectangle 7"/>
+          <p:cNvSpPr/>
+          <p:nvPr/>
+        </p:nvSpPr>
+        <p:spPr>
+          <a:xfrm>
+            <a:off x="760000" y="2650000"/>
+            <a:ext cx="120000" cy="1500000"/>
+          </a:xfrm>
+          <a:prstGeom prst="rect">
+            <a:avLst/>
+          </a:prstGeom>
+          <a:solidFill>
+            <a:srgbClr val="0545E8"/>
+          </a:solidFill>
+          <a:ln>
+            <a:noFill/>
+          </a:ln>
+          <a:effectLst/>
+        </p:spPr>
+        <p:style>
+          <a:lnRef idx="1">
+            <a:schemeClr val="accent1"/>
+          </a:lnRef>
+          <a:fillRef idx="3">
+            <a:schemeClr val="accent1"/>
+          </a:fillRef>
+          <a:effectRef idx="2">
+            <a:schemeClr val="accent1"/>
+          </a:effectRef>
+          <a:fontRef idx="minor">
+            <a:schemeClr val="lt1"/>
+          </a:fontRef>
+        </p:style>
+        <p:txBody>
+          <a:bodyPr rtlCol="0" anchor="ctr"/>
+          <a:lstStyle/>
+          <a:p>
+            <a:pPr algn="ctr"/>
+          </a:p>
+        </p:txBody>
+      </p:sp>
+      <p:sp>
+        <p:nvSpPr>
+          <p:cNvPr id="9" name="TextBox 8"/>
+          <p:cNvSpPr txBox="1"/>
+          <p:nvPr/>
+        </p:nvSpPr>
+        <p:spPr>
+          <a:xfrm>
+            <a:off x="1000000" y="2750000"/>
+            <a:ext cx="1600000" cy="360000"/>
+          </a:xfrm>
+          <a:prstGeom prst="rect">
+            <a:avLst/>
+          </a:prstGeom>
+          <a:noFill/>
+        </p:spPr>
+        <p:txBody>
+          <a:bodyPr wrap="square" anchor="ctr">
+            <a:spAutoFit/>
+          </a:bodyPr>
+          <a:lstStyle/>
+          <a:p>
+            <a:pPr algn="l">
+              <a:lnSpc>
+                <a:spcPct val="110000"/>
+              </a:lnSpc>
+              <a:spcAft>
+                <a:spcPts val="600"/>
+              </a:spcAft>
+            </a:pPr>
+            <a:r>
+              <a:rPr sz="1400" b="1">
+                <a:solidFill>
+                  <a:srgbClr val="0545E8"/>
+                </a:solidFill>
+                <a:latin typeface="微软雅黑"/>
+              </a:rPr>
+              <a:t>◆ 为什么加索引</a:t>
+            </a:r>
+            <a:endParaRPr sz="1400" b="1">
+              <a:solidFill>
+                <a:srgbClr val="0545E8"/>
+              </a:solidFill>
+              <a:latin typeface="微软雅黑" panose="020B0502040204020203" charset="-122"/>
+            </a:endParaRPr>
+          </a:p>
+        </p:txBody>
+      </p:sp>
+      <p:sp>
+        <p:nvSpPr>
+          <p:cNvPr id="10" name="TextBox 9"/>
+          <p:cNvSpPr txBox="1"/>
+          <p:nvPr/>
+        </p:nvSpPr>
+        <p:spPr>
+          <a:xfrm>
+            <a:off x="1000000" y="3170000"/>
+            <a:ext cx="4800000" cy="900000"/>
+          </a:xfrm>
+          <a:prstGeom prst="rect">
+            <a:avLst/>
+          </a:prstGeom>
+          <a:noFill/>
+        </p:spPr>
+        <p:txBody>
+          <a:bodyPr wrap="square" anchor="t">
+            <a:spAutoFit/>
+          </a:bodyPr>
+          <a:lstStyle/>
+          <a:p>
+            <a:pPr algn="l">
+              <a:lnSpc>
+                <a:spcPct val="130000"/>
+              </a:lnSpc>
+              <a:spcAft>
+                <a:spcPts val="600"/>
+              </a:spcAft>
+            </a:pPr>
+            <a:r>
+              <a:rPr sz="1300" b="0">
+                <a:solidFill>
+                  <a:srgbClr val="010328"/>
+                </a:solidFill>
+                <a:latin typeface="微软雅黑"/>
+              </a:rPr>
+              <a:t>where(device_id=..) 频繁查询列上建倒排索引——等值查询从全表扫描降为索引直取</a:t>
+            </a:r>
+            <a:endParaRPr sz="1300" b="0">
+              <a:solidFill>
+                <a:srgbClr val="010328"/>
+              </a:solidFill>
+              <a:latin typeface="微软雅黑" panose="020B0502040204020203" charset="-122"/>
+            </a:endParaRPr>
+          </a:p>
+        </p:txBody>
+      </p:sp>
+      <p:sp>
+        <p:nvSpPr>
+          <p:cNvPr id="11" name="Rectangle 10"/>
+          <p:cNvSpPr/>
+          <p:nvPr/>
+        </p:nvSpPr>
+        <p:spPr>
+          <a:xfrm>
+            <a:off x="760000" y="4300000"/>
+            <a:ext cx="5300000" cy="1500000"/>
+          </a:xfrm>
+          <a:prstGeom prst="rect">
+            <a:avLst/>
+          </a:prstGeom>
+          <a:solidFill>
+            <a:srgbClr val="F3F6FD"/>
+          </a:solidFill>
+          <a:ln>
+            <a:solidFill>
+              <a:srgbClr val="0475B6"/>
+            </a:solidFill>
+          </a:ln>
+          <a:effectLst/>
+        </p:spPr>
+        <p:style>
+          <a:lnRef idx="1">
+            <a:schemeClr val="accent1"/>
+          </a:lnRef>
+          <a:fillRef idx="3">
+            <a:schemeClr val="accent1"/>
+          </a:fillRef>
+          <a:effectRef idx="2">
+            <a:schemeClr val="accent1"/>
+          </a:effectRef>
+          <a:fontRef idx="minor">
+            <a:schemeClr val="lt1"/>
+          </a:fontRef>
+        </p:style>
+        <p:txBody>
+          <a:bodyPr rtlCol="0" anchor="ctr"/>
+          <a:lstStyle/>
+          <a:p>
+            <a:pPr algn="ctr"/>
+          </a:p>
+        </p:txBody>
+      </p:sp>
+      <p:sp>
+        <p:nvSpPr>
+          <p:cNvPr id="12" name="Rectangle 11"/>
+          <p:cNvSpPr/>
+          <p:nvPr/>
+        </p:nvSpPr>
+        <p:spPr>
+          <a:xfrm>
+            <a:off x="760000" y="4300000"/>
+            <a:ext cx="120000" cy="1500000"/>
+          </a:xfrm>
+          <a:prstGeom prst="rect">
+            <a:avLst/>
+          </a:prstGeom>
+          <a:solidFill>
+            <a:srgbClr val="0475B6"/>
+          </a:solidFill>
+          <a:ln>
+            <a:noFill/>
+          </a:ln>
+          <a:effectLst/>
+        </p:spPr>
+        <p:style>
+          <a:lnRef idx="1">
+            <a:schemeClr val="accent1"/>
+          </a:lnRef>
+          <a:fillRef idx="3">
+            <a:schemeClr val="accent1"/>
+          </a:fillRef>
+          <a:effectRef idx="2">
+            <a:schemeClr val="accent1"/>
+          </a:effectRef>
+          <a:fontRef idx="minor">
+            <a:schemeClr val="lt1"/>
+          </a:fontRef>
+        </p:style>
+        <p:txBody>
+          <a:bodyPr rtlCol="0" anchor="ctr"/>
+          <a:lstStyle/>
+          <a:p>
+            <a:pPr algn="ctr"/>
+          </a:p>
+        </p:txBody>
+      </p:sp>
+      <p:sp>
+        <p:nvSpPr>
+          <p:cNvPr id="13" name="TextBox 12"/>
+          <p:cNvSpPr txBox="1"/>
+          <p:nvPr/>
+        </p:nvSpPr>
+        <p:spPr>
+          <a:xfrm>
+            <a:off x="1000000" y="4400000"/>
+            <a:ext cx="1600000" cy="360000"/>
+          </a:xfrm>
+          <a:prstGeom prst="rect">
+            <a:avLst/>
+          </a:prstGeom>
+          <a:noFill/>
+        </p:spPr>
+        <p:txBody>
+          <a:bodyPr wrap="square" anchor="ctr">
+            <a:spAutoFit/>
+          </a:bodyPr>
+          <a:lstStyle/>
+          <a:p>
+            <a:pPr algn="l">
+              <a:lnSpc>
+                <a:spcPct val="110000"/>
+              </a:lnSpc>
+              <a:spcAft>
+                <a:spcPts val="600"/>
+              </a:spcAft>
+            </a:pPr>
+            <a:r>
+              <a:rPr sz="1400" b="1">
+                <a:solidFill>
+                  <a:srgbClr val="0475B6"/>
+                </a:solidFill>
+                <a:latin typeface="微软雅黑"/>
+              </a:rPr>
+              <a:t>◆ 什么时候建</a:t>
+            </a:r>
+            <a:endParaRPr sz="1400" b="1">
+              <a:solidFill>
+                <a:srgbClr val="0475B6"/>
+              </a:solidFill>
+              <a:latin typeface="微软雅黑" panose="020B0502040204020203" charset="-122"/>
+            </a:endParaRPr>
+          </a:p>
+        </p:txBody>
+      </p:sp>
+      <p:sp>
+        <p:nvSpPr>
+          <p:cNvPr id="14" name="TextBox 13"/>
+          <p:cNvSpPr txBox="1"/>
+          <p:nvPr/>
+        </p:nvSpPr>
+        <p:spPr>
+          <a:xfrm>
+            <a:off x="1000000" y="4820000"/>
+            <a:ext cx="4800000" cy="900000"/>
+          </a:xfrm>
+          <a:prstGeom prst="rect">
+            <a:avLst/>
+          </a:prstGeom>
+          <a:noFill/>
+        </p:spPr>
+        <p:txBody>
+          <a:bodyPr wrap="square" anchor="t">
+            <a:spAutoFit/>
+          </a:bodyPr>
+          <a:lstStyle/>
+          <a:p>
+            <a:pPr algn="l">
+              <a:lnSpc>
+                <a:spcPct val="130000"/>
+              </a:lnSpc>
+              <a:spcAft>
+                <a:spcPts val="600"/>
+              </a:spcAft>
+            </a:pPr>
+            <a:r>
+              <a:rPr sz="1300" b="0">
+                <a:solidFill>
+                  <a:srgbClr val="010328"/>
+                </a:solidFill>
+                <a:latin typeface="微软雅黑"/>
+              </a:rPr>
+              <a:t>高频等值查询列建索引；写多读少、筛选性差的列不建——索引本身占空间与维护成本</a:t>
+            </a:r>
+            <a:endParaRPr sz="1300" b="0">
+              <a:solidFill>
+                <a:srgbClr val="010328"/>
+              </a:solidFill>
+              <a:latin typeface="微软雅黑" panose="020B0502040204020203" charset="-122"/>
+            </a:endParaRPr>
+          </a:p>
+        </p:txBody>
+      </p:sp>
+      <p:sp>
+        <p:nvSpPr>
+          <p:cNvPr id="15" name="Rectangle 14"/>
+          <p:cNvSpPr/>
+          <p:nvPr/>
+        </p:nvSpPr>
+        <p:spPr>
+          <a:xfrm>
+            <a:off x="6300000" y="2650000"/>
+            <a:ext cx="5360000" cy="1500000"/>
+          </a:xfrm>
+          <a:prstGeom prst="rect">
+            <a:avLst/>
+          </a:prstGeom>
+          <a:solidFill>
+            <a:srgbClr val="0D112A"/>
+          </a:solidFill>
+          <a:ln>
+            <a:noFill/>
+          </a:ln>
+          <a:effectLst/>
+        </p:spPr>
+        <p:style>
+          <a:lnRef idx="1">
+            <a:schemeClr val="accent1"/>
+          </a:lnRef>
+          <a:fillRef idx="3">
+            <a:schemeClr val="accent1"/>
+          </a:fillRef>
+          <a:effectRef idx="2">
+            <a:schemeClr val="accent1"/>
+          </a:effectRef>
+          <a:fontRef idx="minor">
+            <a:schemeClr val="lt1"/>
+          </a:fontRef>
+        </p:style>
+        <p:txBody>
+          <a:bodyPr rtlCol="0" anchor="ctr"/>
+          <a:lstStyle/>
+          <a:p>
+            <a:pPr algn="ctr"/>
+          </a:p>
+        </p:txBody>
+      </p:sp>
+      <p:sp>
+        <p:nvSpPr>
+          <p:cNvPr id="16" name="Rectangle 15"/>
+          <p:cNvSpPr/>
+          <p:nvPr/>
+        </p:nvSpPr>
+        <p:spPr>
+          <a:xfrm>
+            <a:off x="6300000" y="2650000"/>
+            <a:ext cx="5360000" cy="120000"/>
+          </a:xfrm>
+          <a:prstGeom prst="rect">
+            <a:avLst/>
+          </a:prstGeom>
+          <a:solidFill>
+            <a:srgbClr val="F5670F"/>
+          </a:solidFill>
+          <a:ln>
+            <a:noFill/>
+          </a:ln>
+          <a:effectLst/>
+        </p:spPr>
+        <p:style>
+          <a:lnRef idx="1">
+            <a:schemeClr val="accent1"/>
+          </a:lnRef>
+          <a:fillRef idx="3">
+            <a:schemeClr val="accent1"/>
+          </a:fillRef>
+          <a:effectRef idx="2">
+            <a:schemeClr val="accent1"/>
+          </a:effectRef>
+          <a:fontRef idx="minor">
+            <a:schemeClr val="lt1"/>
+          </a:fontRef>
+        </p:style>
+        <p:txBody>
+          <a:bodyPr rtlCol="0" anchor="ctr"/>
+          <a:lstStyle/>
+          <a:p>
+            <a:pPr algn="ctr"/>
+          </a:p>
+        </p:txBody>
+      </p:sp>
+      <p:sp>
+        <p:nvSpPr>
+          <p:cNvPr id="17" name="TextBox 16"/>
+          <p:cNvSpPr txBox="1"/>
+          <p:nvPr/>
+        </p:nvSpPr>
+        <p:spPr>
+          <a:xfrm>
+            <a:off x="6600000" y="2930000"/>
+            <a:ext cx="4800000" cy="1100000"/>
+          </a:xfrm>
+          <a:prstGeom prst="rect">
+            <a:avLst/>
+          </a:prstGeom>
+          <a:noFill/>
+        </p:spPr>
+        <p:txBody>
+          <a:bodyPr wrap="square" anchor="t">
+            <a:spAutoFit/>
+          </a:bodyPr>
+          <a:lstStyle/>
+          <a:p>
+            <a:pPr algn="l">
+              <a:lnSpc>
+                <a:spcPct val="125000"/>
+              </a:lnSpc>
+              <a:spcAft>
+                <a:spcPts val="600"/>
+              </a:spcAft>
+            </a:pPr>
+            <a:r>
+              <a:rPr sz="1150" b="0">
+                <a:solidFill>
+                  <a:srgbClr val="D6DEF6"/>
+                </a:solidFill>
+                <a:latin typeface="微软雅黑"/>
+              </a:rPr>
+              <a:t>def test_index_query(tbl):</a:t>
+            </a:r>
+            <a:endParaRPr sz="1150" b="0">
+              <a:solidFill>
+                <a:srgbClr val="D6DEF6"/>
+              </a:solidFill>
+              <a:latin typeface="微软雅黑" panose="020B0502040204020203" charset="-122"/>
+            </a:endParaRPr>
+          </a:p>
+          <a:p>
+            <a:r>
+              <a:rPr sz="1150" b="0">
+                <a:solidFill>
+                  <a:srgbClr val="D6DEF6"/>
+                </a:solidFill>
+                <a:latin typeface="微软雅黑"/>
+              </a:rPr>
+              <a:t>    assert len(tbl.where(device_id="DEV-02")) == 3</a:t>
+            </a:r>
+          </a:p>
+          <a:p>
+            <a:r>
+              <a:rPr sz="1150" b="0">
+                <a:solidFill>
+                  <a:srgbClr val="D6DEF6"/>
+                </a:solidFill>
+                <a:latin typeface="微软雅黑"/>
+              </a:rPr>
+              <a:t>def test_no_index(tbl):</a:t>
+            </a:r>
+          </a:p>
+          <a:p>
+            <a:r>
+              <a:rPr sz="1150" b="0">
+                <a:solidFill>
+                  <a:srgbClr val="D6DEF6"/>
+                </a:solidFill>
+                <a:latin typeface="微软雅黑"/>
+              </a:rPr>
+              <a:t>    assert tbl.explain(temp=3.0) == "FULL SCAN"</a:t>
+            </a:r>
+          </a:p>
+        </p:txBody>
+      </p:sp>
+      <p:sp>
+        <p:nvSpPr>
+          <p:cNvPr id="18" name="Rectangle 17"/>
+          <p:cNvSpPr/>
+          <p:nvPr/>
+        </p:nvSpPr>
+        <p:spPr>
+          <a:xfrm>
+            <a:off x="6300000" y="4300000"/>
+            <a:ext cx="5360000" cy="1500000"/>
+          </a:xfrm>
+          <a:prstGeom prst="rect">
+            <a:avLst/>
+          </a:prstGeom>
+          <a:solidFill>
+            <a:srgbClr val="FFFFFF"/>
+          </a:solidFill>
+          <a:ln>
+            <a:solidFill>
+              <a:srgbClr val="F5670F"/>
+            </a:solidFill>
+          </a:ln>
+          <a:effectLst/>
+        </p:spPr>
+        <p:style>
+          <a:lnRef idx="1">
+            <a:schemeClr val="accent1"/>
+          </a:lnRef>
+          <a:fillRef idx="3">
+            <a:schemeClr val="accent1"/>
+          </a:fillRef>
+          <a:effectRef idx="2">
+            <a:schemeClr val="accent1"/>
+          </a:effectRef>
+          <a:fontRef idx="minor">
+            <a:schemeClr val="lt1"/>
+          </a:fontRef>
+        </p:style>
+        <p:txBody>
+          <a:bodyPr rtlCol="0" anchor="ctr"/>
+          <a:lstStyle/>
+          <a:p>
+            <a:pPr algn="ctr"/>
+          </a:p>
+        </p:txBody>
+      </p:sp>
+      <p:sp>
+        <p:nvSpPr>
+          <p:cNvPr id="19" name="TextBox 18"/>
+          <p:cNvSpPr txBox="1"/>
+          <p:nvPr/>
+        </p:nvSpPr>
+        <p:spPr>
+          <a:xfrm>
+            <a:off x="6600000" y="4400000"/>
+            <a:ext cx="2000000" cy="360000"/>
+          </a:xfrm>
+          <a:prstGeom prst="rect">
+            <a:avLst/>
+          </a:prstGeom>
+          <a:noFill/>
+        </p:spPr>
+        <p:txBody>
+          <a:bodyPr wrap="square" anchor="ctr">
+            <a:spAutoFit/>
+          </a:bodyPr>
+          <a:lstStyle/>
+          <a:p>
+            <a:pPr algn="l">
+              <a:lnSpc>
+                <a:spcPct val="110000"/>
+              </a:lnSpc>
+              <a:spcAft>
+                <a:spcPts val="600"/>
+              </a:spcAft>
+            </a:pPr>
+            <a:r>
+              <a:rPr sz="1400" b="1">
+                <a:solidFill>
+                  <a:srgbClr val="F5670F"/>
+                </a:solidFill>
+                <a:latin typeface="微软雅黑"/>
+              </a:rPr>
+              <a:t>◆ 设计要点</a:t>
+            </a:r>
+            <a:endParaRPr sz="1400" b="1">
+              <a:solidFill>
+                <a:srgbClr val="F5670F"/>
+              </a:solidFill>
+              <a:latin typeface="微软雅黑" panose="020B0502040204020203" charset="-122"/>
+            </a:endParaRPr>
+          </a:p>
+        </p:txBody>
+      </p:sp>
+      <p:sp>
+        <p:nvSpPr>
+          <p:cNvPr id="20" name="TextBox 19"/>
+          <p:cNvSpPr txBox="1"/>
+          <p:nvPr/>
+        </p:nvSpPr>
+        <p:spPr>
+          <a:xfrm>
+            <a:off x="6600000" y="4820000"/>
+            <a:ext cx="4800000" cy="900000"/>
+          </a:xfrm>
+          <a:prstGeom prst="rect">
+            <a:avLst/>
+          </a:prstGeom>
+          <a:noFill/>
+        </p:spPr>
+        <p:txBody>
+          <a:bodyPr wrap="square" anchor="t">
+            <a:spAutoFit/>
+          </a:bodyPr>
+          <a:lstStyle/>
+          <a:p>
+            <a:pPr algn="l">
+              <a:lnSpc>
+                <a:spcPct val="130000"/>
+              </a:lnSpc>
+              <a:spcAft>
+                <a:spcPts val="600"/>
+              </a:spcAft>
+            </a:pPr>
+            <a:r>
+              <a:rPr sz="1300" b="0">
+                <a:solidFill>
+                  <a:srgbClr val="010328"/>
+                </a:solidFill>
+                <a:latin typeface="微软雅黑"/>
+              </a:rPr>
+              <a:t>对账式验证：有索引结果=无索引结果，机制不同但答案一致——先跑对再谈优化</a:t>
+            </a:r>
+            <a:endParaRPr sz="1300" b="0">
+              <a:solidFill>
+                <a:srgbClr val="FF0000"/>
+              </a:solidFill>
+              <a:latin typeface="微软雅黑" panose="020B0502040204020203" charset="-122"/>
+            </a:endParaRPr>
+          </a:p>
+        </p:txBody>
+      </p:sp>
+      <p:sp>
+        <p:nvSpPr>
+          <p:cNvPr id="21" name="Rectangle 20"/>
+          <p:cNvSpPr/>
+          <p:nvPr/>
+        </p:nvSpPr>
+        <p:spPr>
+          <a:xfrm>
+            <a:off x="500000" y="6500000"/>
+            <a:ext cx="11100000" cy="20000"/>
+          </a:xfrm>
+          <a:prstGeom prst="rect">
+            <a:avLst/>
+          </a:prstGeom>
+          <a:solidFill>
+            <a:srgbClr val="C9D4EE"/>
+          </a:solidFill>
+          <a:ln>
+            <a:noFill/>
+          </a:ln>
+          <a:effectLst/>
+        </p:spPr>
+        <p:style>
+          <a:lnRef idx="1">
+            <a:schemeClr val="accent1"/>
+          </a:lnRef>
+          <a:fillRef idx="3">
+            <a:schemeClr val="accent1"/>
+          </a:fillRef>
+          <a:effectRef idx="2">
+            <a:schemeClr val="accent1"/>
+          </a:effectRef>
+          <a:fontRef idx="minor">
+            <a:schemeClr val="lt1"/>
+          </a:fontRef>
+        </p:style>
+        <p:txBody>
+          <a:bodyPr rtlCol="0" anchor="ctr"/>
+          <a:lstStyle/>
+          <a:p>
+            <a:pPr algn="ctr"/>
+          </a:p>
+        </p:txBody>
+      </p:sp>
+      <p:sp>
+        <p:nvSpPr>
+          <p:cNvPr id="22" name="TextBox 21"/>
+          <p:cNvSpPr txBox="1"/>
+          <p:nvPr/>
+        </p:nvSpPr>
+        <p:spPr>
+          <a:xfrm>
+            <a:off x="500000" y="6540000"/>
+            <a:ext cx="7000000" cy="300000"/>
+          </a:xfrm>
+          <a:prstGeom prst="rect">
+            <a:avLst/>
+          </a:prstGeom>
+          <a:noFill/>
+        </p:spPr>
+        <p:txBody>
+          <a:bodyPr wrap="square" anchor="t">
+            <a:spAutoFit/>
+          </a:bodyPr>
+          <a:lstStyle/>
+          <a:p>
+            <a:pPr algn="l">
+              <a:lnSpc>
+                <a:spcPct val="110000"/>
+              </a:lnSpc>
+              <a:spcAft>
+                <a:spcPts val="600"/>
+              </a:spcAft>
+            </a:pPr>
+            <a:r>
+              <a:rPr sz="1000" b="0">
+                <a:solidFill>
+                  <a:srgbClr val="8A97B5"/>
+                </a:solidFill>
+                <a:latin typeface="微软雅黑" panose="020B0502040204020203" charset="-122"/>
+              </a:rPr>
+              <a:t>两江智造集团 · Python程序设计（项目实战）</a:t>
+            </a:r>
+            <a:endParaRPr sz="1000" b="0">
+              <a:solidFill>
+                <a:srgbClr val="8A97B5"/>
+              </a:solidFill>
+              <a:latin typeface="微软雅黑" panose="020B0502040204020203" charset="-122"/>
+            </a:endParaRPr>
+          </a:p>
+        </p:txBody>
+      </p:sp>
+      <p:sp>
+        <p:nvSpPr>
+          <p:cNvPr id="23" name="TextBox 22"/>
+          <p:cNvSpPr txBox="1"/>
+          <p:nvPr/>
+        </p:nvSpPr>
+        <p:spPr>
+          <a:xfrm>
+            <a:off x="10600000" y="6540000"/>
+            <a:ext cx="1000000" cy="300000"/>
+          </a:xfrm>
+          <a:prstGeom prst="rect">
+            <a:avLst/>
+          </a:prstGeom>
+          <a:noFill/>
+        </p:spPr>
+        <p:txBody>
+          <a:bodyPr wrap="square" anchor="t">
+            <a:spAutoFit/>
+          </a:bodyPr>
+          <a:lstStyle/>
+          <a:p>
+            <a:pPr algn="r">
+              <a:lnSpc>
+                <a:spcPct val="110000"/>
+              </a:lnSpc>
+              <a:spcAft>
+                <a:spcPts val="600"/>
+              </a:spcAft>
+            </a:pPr>
+            <a:r>
+              <a:rPr sz="1000" b="0">
+                <a:solidFill>
+                  <a:srgbClr val="8A97B5"/>
+                </a:solidFill>
+                <a:latin typeface="微软雅黑"/>
+              </a:rPr>
+              <a:t>32 / 63</a:t>
+            </a:r>
+            <a:endParaRPr sz="1000" b="0">
+              <a:solidFill>
+                <a:srgbClr val="8A97B5"/>
+              </a:solidFill>
+              <a:latin typeface="微软雅黑" panose="020B0502040204020203" charset="-122"/>
+            </a:endParaRPr>
+          </a:p>
+        </p:txBody>
+      </p:sp>
+    </p:spTree>
+  </p:cSld>
+  <p:clrMapOvr>
+    <a:masterClrMapping/>
+  </p:clrMapOvr>
+</p:sld>
+</file>
+
+<file path=ppt/slides/slide63.xml><?xml version="1.0" encoding="utf-8"?>
+<p:sld xmlns:a="http://schemas.openxmlformats.org/drawingml/2006/main" xmlns:p="http://schemas.openxmlformats.org/presentationml/2006/main" xmlns:r="http://schemas.openxmlformats.org/officeDocument/2006/relationships">
+  <p:cSld>
+    <p:spTree>
+      <p:nvGrpSpPr>
+        <p:cNvPr id="1" name=""/>
+        <p:cNvGrpSpPr/>
+        <p:nvPr/>
+      </p:nvGrpSpPr>
+      <p:grpSpPr/>
+      <p:sp>
+        <p:nvSpPr>
+          <p:cNvPr id="2" name="Rectangle 1"/>
+          <p:cNvSpPr/>
+          <p:nvPr/>
+        </p:nvSpPr>
+        <p:spPr>
+          <a:xfrm>
+            <a:off x="0" y="0"/>
+            <a:ext cx="12192000" cy="1150000"/>
+          </a:xfrm>
+          <a:prstGeom prst="rect">
+            <a:avLst/>
+          </a:prstGeom>
+          <a:solidFill>
+            <a:srgbClr val="010328"/>
+          </a:solidFill>
+          <a:ln>
+            <a:noFill/>
+          </a:ln>
+          <a:effectLst/>
+        </p:spPr>
+        <p:style>
+          <a:lnRef idx="1">
+            <a:schemeClr val="accent1"/>
+          </a:lnRef>
+          <a:fillRef idx="3">
+            <a:schemeClr val="accent1"/>
+          </a:fillRef>
+          <a:effectRef idx="2">
+            <a:schemeClr val="accent1"/>
+          </a:effectRef>
+          <a:fontRef idx="minor">
+            <a:schemeClr val="lt1"/>
+          </a:fontRef>
+        </p:style>
+        <p:txBody>
+          <a:bodyPr rtlCol="0" anchor="ctr"/>
+          <a:lstStyle/>
+          <a:p>
+            <a:pPr algn="ctr"/>
+          </a:p>
+        </p:txBody>
+      </p:sp>
+      <p:sp>
+        <p:nvSpPr>
+          <p:cNvPr id="3" name="Rectangle 2"/>
+          <p:cNvSpPr/>
+          <p:nvPr/>
+        </p:nvSpPr>
+        <p:spPr>
+          <a:xfrm>
+            <a:off x="0" y="1150000"/>
+            <a:ext cx="2600000" cy="70000"/>
+          </a:xfrm>
+          <a:prstGeom prst="rect">
+            <a:avLst/>
+          </a:prstGeom>
+          <a:solidFill>
+            <a:srgbClr val="F5670F"/>
+          </a:solidFill>
+          <a:ln>
+            <a:noFill/>
+          </a:ln>
+          <a:effectLst/>
+        </p:spPr>
+        <p:style>
+          <a:lnRef idx="1">
+            <a:schemeClr val="accent1"/>
+          </a:lnRef>
+          <a:fillRef idx="3">
+            <a:schemeClr val="accent1"/>
+          </a:fillRef>
+          <a:effectRef idx="2">
+            <a:schemeClr val="accent1"/>
+          </a:effectRef>
+          <a:fontRef idx="minor">
+            <a:schemeClr val="lt1"/>
+          </a:fontRef>
+        </p:style>
+        <p:txBody>
+          <a:bodyPr rtlCol="0" anchor="ctr"/>
+          <a:lstStyle/>
+          <a:p>
+            <a:pPr algn="ctr"/>
+          </a:p>
+        </p:txBody>
+      </p:sp>
+      <p:sp>
+        <p:nvSpPr>
+          <p:cNvPr id="4" name="TextBox 3"/>
+          <p:cNvSpPr txBox="1"/>
+          <p:nvPr/>
+        </p:nvSpPr>
+        <p:spPr>
+          <a:xfrm>
+            <a:off x="700000" y="300000"/>
+            <a:ext cx="10792000" cy="700000"/>
+          </a:xfrm>
+          <a:prstGeom prst="rect">
+            <a:avLst/>
+          </a:prstGeom>
+          <a:noFill/>
+        </p:spPr>
+        <p:txBody>
+          <a:bodyPr wrap="square" anchor="t">
+            <a:spAutoFit/>
+          </a:bodyPr>
+          <a:lstStyle/>
+          <a:p>
+            <a:pPr algn="l">
+              <a:lnSpc>
+                <a:spcPct val="110000"/>
+              </a:lnSpc>
+              <a:spcAft>
+                <a:spcPts val="600"/>
+              </a:spcAft>
+            </a:pPr>
+            <a:r>
+              <a:rPr sz="2400" b="1">
+                <a:solidFill>
+                  <a:srgbClr val="FFFFFF"/>
+                </a:solidFill>
+                <a:latin typeface="微软雅黑"/>
+              </a:rPr>
+              <a:t>工程化测试：单测怎么证可靠（GB/T 15532）</a:t>
+            </a:r>
+            <a:endParaRPr sz="2400" b="1">
+              <a:solidFill>
+                <a:srgbClr val="FFFFFF"/>
+              </a:solidFill>
+              <a:latin typeface="微软雅黑" panose="020B0502040204020203" charset="-122"/>
+            </a:endParaRPr>
+          </a:p>
+        </p:txBody>
+      </p:sp>
+      <p:sp>
+        <p:nvSpPr>
+          <p:cNvPr id="5" name="Rectangle 4"/>
+          <p:cNvSpPr/>
+          <p:nvPr/>
+        </p:nvSpPr>
+        <p:spPr>
+          <a:xfrm>
+            <a:off x="760000" y="1750000"/>
+            <a:ext cx="10900000" cy="700000"/>
+          </a:xfrm>
+          <a:prstGeom prst="rect">
+            <a:avLst/>
+          </a:prstGeom>
+          <a:solidFill>
+            <a:srgbClr val="010328"/>
+          </a:solidFill>
+          <a:ln>
+            <a:noFill/>
+          </a:ln>
+          <a:effectLst/>
+        </p:spPr>
+        <p:style>
+          <a:lnRef idx="1">
+            <a:schemeClr val="accent1"/>
+          </a:lnRef>
+          <a:fillRef idx="3">
+            <a:schemeClr val="accent1"/>
+          </a:fillRef>
+          <a:effectRef idx="2">
+            <a:schemeClr val="accent1"/>
+          </a:effectRef>
+          <a:fontRef idx="minor">
+            <a:schemeClr val="lt1"/>
+          </a:fontRef>
+        </p:style>
+        <p:txBody>
+          <a:bodyPr rtlCol="0" anchor="ctr"/>
+          <a:lstStyle/>
+          <a:p>
+            <a:pPr algn="ctr"/>
+          </a:p>
+        </p:txBody>
+      </p:sp>
+      <p:sp>
+        <p:nvSpPr>
+          <p:cNvPr id="6" name="TextBox 5"/>
+          <p:cNvSpPr txBox="1"/>
+          <p:nvPr/>
+        </p:nvSpPr>
+        <p:spPr>
+          <a:xfrm>
+            <a:off x="1000000" y="1830000"/>
+            <a:ext cx="10300000" cy="540000"/>
+          </a:xfrm>
+          <a:prstGeom prst="rect">
+            <a:avLst/>
+          </a:prstGeom>
+          <a:noFill/>
+        </p:spPr>
+        <p:txBody>
+          <a:bodyPr wrap="square" anchor="t">
+            <a:spAutoFit/>
+          </a:bodyPr>
+          <a:lstStyle/>
+          <a:p>
+            <a:pPr algn="l">
+              <a:lnSpc>
+                <a:spcPct val="110000"/>
+              </a:lnSpc>
+              <a:spcAft>
+                <a:spcPts val="600"/>
+              </a:spcAft>
+            </a:pPr>
+            <a:r>
+              <a:rPr sz="2000" b="1">
+                <a:solidFill>
+                  <a:srgbClr val="FFFFFF"/>
+                </a:solidFill>
+                <a:latin typeface="微软雅黑"/>
+              </a:rPr>
+              <a:t>测试计划与报告 · pytest 三层策略</a:t>
+            </a:r>
+            <a:endParaRPr sz="2000" b="1">
+              <a:solidFill>
+                <a:srgbClr val="FFFFFF"/>
+              </a:solidFill>
+              <a:latin typeface="微软雅黑" panose="020B0502040204020203" charset="-122"/>
+            </a:endParaRPr>
+          </a:p>
+        </p:txBody>
+      </p:sp>
+      <p:sp>
+        <p:nvSpPr>
+          <p:cNvPr id="7" name="Rectangle 6"/>
+          <p:cNvSpPr/>
+          <p:nvPr/>
+        </p:nvSpPr>
+        <p:spPr>
+          <a:xfrm>
+            <a:off x="760000" y="2650000"/>
+            <a:ext cx="5300000" cy="1500000"/>
+          </a:xfrm>
+          <a:prstGeom prst="rect">
+            <a:avLst/>
+          </a:prstGeom>
+          <a:solidFill>
+            <a:srgbClr val="F3F6FD"/>
+          </a:solidFill>
+          <a:ln>
+            <a:solidFill>
+              <a:srgbClr val="0545E8"/>
+            </a:solidFill>
+          </a:ln>
+          <a:effectLst/>
+        </p:spPr>
+        <p:style>
+          <a:lnRef idx="1">
+            <a:schemeClr val="accent1"/>
+          </a:lnRef>
+          <a:fillRef idx="3">
+            <a:schemeClr val="accent1"/>
+          </a:fillRef>
+          <a:effectRef idx="2">
+            <a:schemeClr val="accent1"/>
+          </a:effectRef>
+          <a:fontRef idx="minor">
+            <a:schemeClr val="lt1"/>
+          </a:fontRef>
+        </p:style>
+        <p:txBody>
+          <a:bodyPr rtlCol="0" anchor="ctr"/>
+          <a:lstStyle/>
+          <a:p>
+            <a:pPr algn="ctr"/>
+          </a:p>
+        </p:txBody>
+      </p:sp>
+      <p:sp>
+        <p:nvSpPr>
+          <p:cNvPr id="8" name="Rectangle 7"/>
+          <p:cNvSpPr/>
+          <p:nvPr/>
+        </p:nvSpPr>
+        <p:spPr>
+          <a:xfrm>
+            <a:off x="760000" y="2650000"/>
+            <a:ext cx="120000" cy="1500000"/>
+          </a:xfrm>
+          <a:prstGeom prst="rect">
+            <a:avLst/>
+          </a:prstGeom>
+          <a:solidFill>
+            <a:srgbClr val="0545E8"/>
+          </a:solidFill>
+          <a:ln>
+            <a:noFill/>
+          </a:ln>
+          <a:effectLst/>
+        </p:spPr>
+        <p:style>
+          <a:lnRef idx="1">
+            <a:schemeClr val="accent1"/>
+          </a:lnRef>
+          <a:fillRef idx="3">
+            <a:schemeClr val="accent1"/>
+          </a:fillRef>
+          <a:effectRef idx="2">
+            <a:schemeClr val="accent1"/>
+          </a:effectRef>
+          <a:fontRef idx="minor">
+            <a:schemeClr val="lt1"/>
+          </a:fontRef>
+        </p:style>
+        <p:txBody>
+          <a:bodyPr rtlCol="0" anchor="ctr"/>
+          <a:lstStyle/>
+          <a:p>
+            <a:pPr algn="ctr"/>
+          </a:p>
+        </p:txBody>
+      </p:sp>
+      <p:sp>
+        <p:nvSpPr>
+          <p:cNvPr id="9" name="TextBox 8"/>
+          <p:cNvSpPr txBox="1"/>
+          <p:nvPr/>
+        </p:nvSpPr>
+        <p:spPr>
+          <a:xfrm>
+            <a:off x="1000000" y="2750000"/>
+            <a:ext cx="1600000" cy="360000"/>
+          </a:xfrm>
+          <a:prstGeom prst="rect">
+            <a:avLst/>
+          </a:prstGeom>
+          <a:noFill/>
+        </p:spPr>
+        <p:txBody>
+          <a:bodyPr wrap="square" anchor="ctr">
+            <a:spAutoFit/>
+          </a:bodyPr>
+          <a:lstStyle/>
+          <a:p>
+            <a:pPr algn="l">
+              <a:lnSpc>
+                <a:spcPct val="110000"/>
+              </a:lnSpc>
+              <a:spcAft>
+                <a:spcPts val="600"/>
+              </a:spcAft>
+            </a:pPr>
+            <a:r>
+              <a:rPr sz="1400" b="1">
+                <a:solidFill>
+                  <a:srgbClr val="0545E8"/>
+                </a:solidFill>
+                <a:latin typeface="微软雅黑"/>
+              </a:rPr>
+              <a:t>◆ 纯函数单测</a:t>
+            </a:r>
+            <a:endParaRPr sz="1400" b="1">
+              <a:solidFill>
+                <a:srgbClr val="0545E8"/>
+              </a:solidFill>
+              <a:latin typeface="微软雅黑" panose="020B0502040204020203" charset="-122"/>
+            </a:endParaRPr>
+          </a:p>
+        </p:txBody>
+      </p:sp>
+      <p:sp>
+        <p:nvSpPr>
+          <p:cNvPr id="10" name="TextBox 9"/>
+          <p:cNvSpPr txBox="1"/>
+          <p:nvPr/>
+        </p:nvSpPr>
+        <p:spPr>
+          <a:xfrm>
+            <a:off x="1000000" y="3170000"/>
+            <a:ext cx="4800000" cy="900000"/>
+          </a:xfrm>
+          <a:prstGeom prst="rect">
+            <a:avLst/>
+          </a:prstGeom>
+          <a:noFill/>
+        </p:spPr>
+        <p:txBody>
+          <a:bodyPr wrap="square" anchor="t">
+            <a:spAutoFit/>
+          </a:bodyPr>
+          <a:lstStyle/>
+          <a:p>
+            <a:pPr algn="l">
+              <a:lnSpc>
+                <a:spcPct val="130000"/>
+              </a:lnSpc>
+              <a:spcAft>
+                <a:spcPts val="600"/>
+              </a:spcAft>
+            </a:pPr>
+            <a:r>
+              <a:rPr sz="1300" b="0">
+                <a:solidFill>
+                  <a:srgbClr val="010328"/>
+                </a:solidFill>
+                <a:latin typeface="微软雅黑"/>
+              </a:rPr>
+              <a:t>复现: python -m pytest -q ｜ 用例≥6 全绿</a:t>
+            </a:r>
+            <a:endParaRPr sz="1300" b="0">
+              <a:solidFill>
+                <a:srgbClr val="010328"/>
+              </a:solidFill>
+              <a:latin typeface="微软雅黑" panose="020B0502040204020203" charset="-122"/>
+            </a:endParaRPr>
+          </a:p>
+          <a:p>
+            <a:r>
+              <a:rPr sz="1300" b="0">
+                <a:solidFill>
+                  <a:srgbClr val="010328"/>
+                </a:solidFill>
+                <a:latin typeface="微软雅黑"/>
+              </a:rPr>
+              <a:t>按 正常/边界/异常 三档覆盖——可靠性是被测出来的</a:t>
+            </a:r>
+          </a:p>
+        </p:txBody>
+      </p:sp>
+      <p:sp>
+        <p:nvSpPr>
+          <p:cNvPr id="11" name="Rectangle 10"/>
+          <p:cNvSpPr/>
+          <p:nvPr/>
+        </p:nvSpPr>
+        <p:spPr>
+          <a:xfrm>
+            <a:off x="760000" y="4300000"/>
+            <a:ext cx="5300000" cy="1500000"/>
+          </a:xfrm>
+          <a:prstGeom prst="rect">
+            <a:avLst/>
+          </a:prstGeom>
+          <a:solidFill>
+            <a:srgbClr val="F3F6FD"/>
+          </a:solidFill>
+          <a:ln>
+            <a:solidFill>
+              <a:srgbClr val="0475B6"/>
+            </a:solidFill>
+          </a:ln>
+          <a:effectLst/>
+        </p:spPr>
+        <p:style>
+          <a:lnRef idx="1">
+            <a:schemeClr val="accent1"/>
+          </a:lnRef>
+          <a:fillRef idx="3">
+            <a:schemeClr val="accent1"/>
+          </a:fillRef>
+          <a:effectRef idx="2">
+            <a:schemeClr val="accent1"/>
+          </a:effectRef>
+          <a:fontRef idx="minor">
+            <a:schemeClr val="lt1"/>
+          </a:fontRef>
+        </p:style>
+        <p:txBody>
+          <a:bodyPr rtlCol="0" anchor="ctr"/>
+          <a:lstStyle/>
+          <a:p>
+            <a:pPr algn="ctr"/>
+          </a:p>
+        </p:txBody>
+      </p:sp>
+      <p:sp>
+        <p:nvSpPr>
+          <p:cNvPr id="12" name="Rectangle 11"/>
+          <p:cNvSpPr/>
+          <p:nvPr/>
+        </p:nvSpPr>
+        <p:spPr>
+          <a:xfrm>
+            <a:off x="760000" y="4300000"/>
+            <a:ext cx="120000" cy="1500000"/>
+          </a:xfrm>
+          <a:prstGeom prst="rect">
+            <a:avLst/>
+          </a:prstGeom>
+          <a:solidFill>
+            <a:srgbClr val="0475B6"/>
+          </a:solidFill>
+          <a:ln>
+            <a:noFill/>
+          </a:ln>
+          <a:effectLst/>
+        </p:spPr>
+        <p:style>
+          <a:lnRef idx="1">
+            <a:schemeClr val="accent1"/>
+          </a:lnRef>
+          <a:fillRef idx="3">
+            <a:schemeClr val="accent1"/>
+          </a:fillRef>
+          <a:effectRef idx="2">
+            <a:schemeClr val="accent1"/>
+          </a:effectRef>
+          <a:fontRef idx="minor">
+            <a:schemeClr val="lt1"/>
+          </a:fontRef>
+        </p:style>
+        <p:txBody>
+          <a:bodyPr rtlCol="0" anchor="ctr"/>
+          <a:lstStyle/>
+          <a:p>
+            <a:pPr algn="ctr"/>
+          </a:p>
+        </p:txBody>
+      </p:sp>
+      <p:sp>
+        <p:nvSpPr>
+          <p:cNvPr id="13" name="TextBox 12"/>
+          <p:cNvSpPr txBox="1"/>
+          <p:nvPr/>
+        </p:nvSpPr>
+        <p:spPr>
+          <a:xfrm>
+            <a:off x="1000000" y="4400000"/>
+            <a:ext cx="1600000" cy="360000"/>
+          </a:xfrm>
+          <a:prstGeom prst="rect">
+            <a:avLst/>
+          </a:prstGeom>
+          <a:noFill/>
+        </p:spPr>
+        <p:txBody>
+          <a:bodyPr wrap="square" anchor="ctr">
+            <a:spAutoFit/>
+          </a:bodyPr>
+          <a:lstStyle/>
+          <a:p>
+            <a:pPr algn="l">
+              <a:lnSpc>
+                <a:spcPct val="110000"/>
+              </a:lnSpc>
+              <a:spcAft>
+                <a:spcPts val="600"/>
+              </a:spcAft>
+            </a:pPr>
+            <a:r>
+              <a:rPr sz="1400" b="1">
+                <a:solidFill>
+                  <a:srgbClr val="0475B6"/>
+                </a:solidFill>
+                <a:latin typeface="微软雅黑"/>
+              </a:rPr>
+              <a:t>◆ 用例清单</a:t>
+            </a:r>
+            <a:endParaRPr sz="1400" b="1">
+              <a:solidFill>
+                <a:srgbClr val="0475B6"/>
+              </a:solidFill>
+              <a:latin typeface="微软雅黑" panose="020B0502040204020203" charset="-122"/>
+            </a:endParaRPr>
+          </a:p>
+        </p:txBody>
+      </p:sp>
+      <p:sp>
+        <p:nvSpPr>
+          <p:cNvPr id="14" name="TextBox 13"/>
+          <p:cNvSpPr txBox="1"/>
+          <p:nvPr/>
+        </p:nvSpPr>
+        <p:spPr>
+          <a:xfrm>
+            <a:off x="1000000" y="4820000"/>
+            <a:ext cx="4800000" cy="900000"/>
+          </a:xfrm>
+          <a:prstGeom prst="rect">
+            <a:avLst/>
+          </a:prstGeom>
+          <a:noFill/>
+        </p:spPr>
+        <p:txBody>
+          <a:bodyPr wrap="square" anchor="t">
+            <a:spAutoFit/>
+          </a:bodyPr>
+          <a:lstStyle/>
+          <a:p>
+            <a:pPr algn="l">
+              <a:lnSpc>
+                <a:spcPct val="130000"/>
+              </a:lnSpc>
+              <a:spcAft>
+                <a:spcPts val="600"/>
+              </a:spcAft>
+            </a:pPr>
+            <a:r>
+              <a:rPr sz="1300" b="0">
+                <a:solidFill>
+                  <a:srgbClr val="010328"/>
+                </a:solidFill>
+                <a:latin typeface="微软雅黑"/>
+              </a:rPr>
+              <a:t>TC-01 缺字段 insert → ValueError</a:t>
+            </a:r>
+            <a:endParaRPr sz="1300" b="0">
+              <a:solidFill>
+                <a:srgbClr val="010328"/>
+              </a:solidFill>
+              <a:latin typeface="微软雅黑" panose="020B0502040204020203" charset="-122"/>
+            </a:endParaRPr>
+          </a:p>
+          <a:p>
+            <a:r>
+              <a:rPr sz="1300" b="0">
+                <a:solidFill>
+                  <a:srgbClr val="010328"/>
+                </a:solidFill>
+                <a:latin typeface="微软雅黑"/>
+              </a:rPr>
+              <a:t>TC-02 索引查询正确 | TC-03 无索引→FULL SCAN</a:t>
+            </a:r>
+          </a:p>
+          <a:p>
+            <a:r>
+              <a:rPr sz="1300" b="0">
+                <a:solidFill>
+                  <a:srgbClr val="010328"/>
+                </a:solidFill>
+                <a:latin typeface="微软雅黑"/>
+              </a:rPr>
+              <a:t>TC-04 空字段表 → ValueError</a:t>
+            </a:r>
+          </a:p>
+        </p:txBody>
+      </p:sp>
+      <p:sp>
+        <p:nvSpPr>
+          <p:cNvPr id="15" name="Rectangle 14"/>
+          <p:cNvSpPr/>
+          <p:nvPr/>
+        </p:nvSpPr>
+        <p:spPr>
+          <a:xfrm>
+            <a:off x="6300000" y="2650000"/>
+            <a:ext cx="5360000" cy="1500000"/>
+          </a:xfrm>
+          <a:prstGeom prst="rect">
+            <a:avLst/>
+          </a:prstGeom>
+          <a:solidFill>
+            <a:srgbClr val="0D112A"/>
+          </a:solidFill>
+          <a:ln>
+            <a:noFill/>
+          </a:ln>
+          <a:effectLst/>
+        </p:spPr>
+        <p:style>
+          <a:lnRef idx="1">
+            <a:schemeClr val="accent1"/>
+          </a:lnRef>
+          <a:fillRef idx="3">
+            <a:schemeClr val="accent1"/>
+          </a:fillRef>
+          <a:effectRef idx="2">
+            <a:schemeClr val="accent1"/>
+          </a:effectRef>
+          <a:fontRef idx="minor">
+            <a:schemeClr val="lt1"/>
+          </a:fontRef>
+        </p:style>
+        <p:txBody>
+          <a:bodyPr rtlCol="0" anchor="ctr"/>
+          <a:lstStyle/>
+          <a:p>
+            <a:pPr algn="ctr"/>
+          </a:p>
+        </p:txBody>
+      </p:sp>
+      <p:sp>
+        <p:nvSpPr>
+          <p:cNvPr id="16" name="Rectangle 15"/>
+          <p:cNvSpPr/>
+          <p:nvPr/>
+        </p:nvSpPr>
+        <p:spPr>
+          <a:xfrm>
+            <a:off x="6300000" y="2650000"/>
+            <a:ext cx="5360000" cy="120000"/>
+          </a:xfrm>
+          <a:prstGeom prst="rect">
+            <a:avLst/>
+          </a:prstGeom>
+          <a:solidFill>
+            <a:srgbClr val="F5670F"/>
+          </a:solidFill>
+          <a:ln>
+            <a:noFill/>
+          </a:ln>
+          <a:effectLst/>
+        </p:spPr>
+        <p:style>
+          <a:lnRef idx="1">
+            <a:schemeClr val="accent1"/>
+          </a:lnRef>
+          <a:fillRef idx="3">
+            <a:schemeClr val="accent1"/>
+          </a:fillRef>
+          <a:effectRef idx="2">
+            <a:schemeClr val="accent1"/>
+          </a:effectRef>
+          <a:fontRef idx="minor">
+            <a:schemeClr val="lt1"/>
+          </a:fontRef>
+        </p:style>
+        <p:txBody>
+          <a:bodyPr rtlCol="0" anchor="ctr"/>
+          <a:lstStyle/>
+          <a:p>
+            <a:pPr algn="ctr"/>
+          </a:p>
+        </p:txBody>
+      </p:sp>
+      <p:sp>
+        <p:nvSpPr>
+          <p:cNvPr id="17" name="TextBox 16"/>
+          <p:cNvSpPr txBox="1"/>
+          <p:nvPr/>
+        </p:nvSpPr>
+        <p:spPr>
+          <a:xfrm>
+            <a:off x="6600000" y="2930000"/>
+            <a:ext cx="4800000" cy="1100000"/>
+          </a:xfrm>
+          <a:prstGeom prst="rect">
+            <a:avLst/>
+          </a:prstGeom>
+          <a:noFill/>
+        </p:spPr>
+        <p:txBody>
+          <a:bodyPr wrap="square" anchor="t">
+            <a:spAutoFit/>
+          </a:bodyPr>
+          <a:lstStyle/>
+          <a:p>
+            <a:pPr algn="l">
+              <a:lnSpc>
+                <a:spcPct val="125000"/>
+              </a:lnSpc>
+              <a:spcAft>
+                <a:spcPts val="600"/>
+              </a:spcAft>
+            </a:pPr>
+            <a:r>
+              <a:rPr sz="1150" b="0">
+                <a:solidFill>
+                  <a:srgbClr val="D6DEF6"/>
+                </a:solidFill>
+                <a:latin typeface="微软雅黑"/>
+              </a:rPr>
+              <a:t>def test_index_query(tbl):</a:t>
+            </a:r>
+            <a:endParaRPr sz="1150" b="0">
+              <a:solidFill>
+                <a:srgbClr val="D6DEF6"/>
+              </a:solidFill>
+              <a:latin typeface="微软雅黑" panose="020B0502040204020203" charset="-122"/>
+            </a:endParaRPr>
+          </a:p>
+          <a:p>
+            <a:r>
+              <a:rPr sz="1150" b="0">
+                <a:solidFill>
+                  <a:srgbClr val="D6DEF6"/>
+                </a:solidFill>
+                <a:latin typeface="微软雅黑"/>
+              </a:rPr>
+              <a:t>    assert len(tbl.where(device_id="DEV-02")) == 3</a:t>
+            </a:r>
+          </a:p>
+          <a:p>
+            <a:r>
+              <a:rPr sz="1150" b="0">
+                <a:solidFill>
+                  <a:srgbClr val="D6DEF6"/>
+                </a:solidFill>
+                <a:latin typeface="微软雅黑"/>
+              </a:rPr>
+              <a:t>def test_no_index(tbl):</a:t>
+            </a:r>
+          </a:p>
+          <a:p>
+            <a:r>
+              <a:rPr sz="1150" b="0">
+                <a:solidFill>
+                  <a:srgbClr val="D6DEF6"/>
+                </a:solidFill>
+                <a:latin typeface="微软雅黑"/>
+              </a:rPr>
+              <a:t>    assert tbl.explain(temp=3.0) == "FULL SCAN"</a:t>
+            </a:r>
+          </a:p>
+        </p:txBody>
+      </p:sp>
+      <p:sp>
+        <p:nvSpPr>
+          <p:cNvPr id="18" name="Rectangle 17"/>
+          <p:cNvSpPr/>
+          <p:nvPr/>
+        </p:nvSpPr>
+        <p:spPr>
+          <a:xfrm>
+            <a:off x="6300000" y="4300000"/>
+            <a:ext cx="5360000" cy="1500000"/>
+          </a:xfrm>
+          <a:prstGeom prst="rect">
+            <a:avLst/>
+          </a:prstGeom>
+          <a:solidFill>
+            <a:srgbClr val="FFFFFF"/>
+          </a:solidFill>
+          <a:ln>
+            <a:solidFill>
+              <a:srgbClr val="F5670F"/>
+            </a:solidFill>
+          </a:ln>
+          <a:effectLst/>
+        </p:spPr>
+        <p:style>
+          <a:lnRef idx="1">
+            <a:schemeClr val="accent1"/>
+          </a:lnRef>
+          <a:fillRef idx="3">
+            <a:schemeClr val="accent1"/>
+          </a:fillRef>
+          <a:effectRef idx="2">
+            <a:schemeClr val="accent1"/>
+          </a:effectRef>
+          <a:fontRef idx="minor">
+            <a:schemeClr val="lt1"/>
+          </a:fontRef>
+        </p:style>
+        <p:txBody>
+          <a:bodyPr rtlCol="0" anchor="ctr"/>
+          <a:lstStyle/>
+          <a:p>
+            <a:pPr algn="ctr"/>
+          </a:p>
+        </p:txBody>
+      </p:sp>
+      <p:sp>
+        <p:nvSpPr>
+          <p:cNvPr id="19" name="TextBox 18"/>
+          <p:cNvSpPr txBox="1"/>
+          <p:nvPr/>
+        </p:nvSpPr>
+        <p:spPr>
+          <a:xfrm>
+            <a:off x="6600000" y="4400000"/>
+            <a:ext cx="2000000" cy="360000"/>
+          </a:xfrm>
+          <a:prstGeom prst="rect">
+            <a:avLst/>
+          </a:prstGeom>
+          <a:noFill/>
+        </p:spPr>
+        <p:txBody>
+          <a:bodyPr wrap="square" anchor="ctr">
+            <a:spAutoFit/>
+          </a:bodyPr>
+          <a:lstStyle/>
+          <a:p>
+            <a:pPr algn="l">
+              <a:lnSpc>
+                <a:spcPct val="110000"/>
+              </a:lnSpc>
+              <a:spcAft>
+                <a:spcPts val="600"/>
+              </a:spcAft>
+            </a:pPr>
+            <a:r>
+              <a:rPr sz="1400" b="1">
+                <a:solidFill>
+                  <a:srgbClr val="F5670F"/>
+                </a:solidFill>
+                <a:latin typeface="微软雅黑"/>
+              </a:rPr>
+              <a:t>◆ GB/T 15532 三层</a:t>
+            </a:r>
+            <a:endParaRPr sz="1400" b="1">
+              <a:solidFill>
+                <a:srgbClr val="F5670F"/>
+              </a:solidFill>
+              <a:latin typeface="微软雅黑" panose="020B0502040204020203" charset="-122"/>
+            </a:endParaRPr>
+          </a:p>
+        </p:txBody>
+      </p:sp>
+      <p:sp>
+        <p:nvSpPr>
+          <p:cNvPr id="20" name="TextBox 19"/>
+          <p:cNvSpPr txBox="1"/>
+          <p:nvPr/>
+        </p:nvSpPr>
+        <p:spPr>
+          <a:xfrm>
+            <a:off x="6600000" y="4820000"/>
+            <a:ext cx="4800000" cy="900000"/>
+          </a:xfrm>
+          <a:prstGeom prst="rect">
+            <a:avLst/>
+          </a:prstGeom>
+          <a:noFill/>
+        </p:spPr>
+        <p:txBody>
+          <a:bodyPr wrap="square" anchor="t">
+            <a:spAutoFit/>
+          </a:bodyPr>
+          <a:lstStyle/>
+          <a:p>
+            <a:pPr algn="l">
+              <a:lnSpc>
+                <a:spcPct val="130000"/>
+              </a:lnSpc>
+              <a:spcAft>
+                <a:spcPts val="600"/>
+              </a:spcAft>
+            </a:pPr>
+            <a:r>
+              <a:rPr sz="1300" b="0">
+                <a:solidFill>
+                  <a:srgbClr val="010328"/>
+                </a:solidFill>
+                <a:latin typeface="微软雅黑"/>
+              </a:rPr>
+              <a:t>单元(纯函数) / 集成(pipeline端到端) / 回归(pytest -q)</a:t>
+            </a:r>
+            <a:endParaRPr sz="1300" b="0">
+              <a:solidFill>
+                <a:srgbClr val="FF0000"/>
+              </a:solidFill>
+              <a:latin typeface="微软雅黑" panose="020B0502040204020203" charset="-122"/>
+            </a:endParaRPr>
+          </a:p>
+          <a:p>
+            <a:r>
+              <a:rPr sz="1300" b="0">
+                <a:solidFill>
+                  <a:srgbClr val="010328"/>
+                </a:solidFill>
+                <a:latin typeface="微软雅黑"/>
+              </a:rPr>
+              <a:t>缺陷记录: 本轮无遗留；退出码 0</a:t>
+            </a:r>
+          </a:p>
+        </p:txBody>
+      </p:sp>
+      <p:sp>
+        <p:nvSpPr>
+          <p:cNvPr id="21" name="Rectangle 20"/>
+          <p:cNvSpPr/>
+          <p:nvPr/>
+        </p:nvSpPr>
+        <p:spPr>
+          <a:xfrm>
+            <a:off x="500000" y="6500000"/>
+            <a:ext cx="11100000" cy="20000"/>
+          </a:xfrm>
+          <a:prstGeom prst="rect">
+            <a:avLst/>
+          </a:prstGeom>
+          <a:solidFill>
+            <a:srgbClr val="C9D4EE"/>
+          </a:solidFill>
+          <a:ln>
+            <a:noFill/>
+          </a:ln>
+          <a:effectLst/>
+        </p:spPr>
+        <p:style>
+          <a:lnRef idx="1">
+            <a:schemeClr val="accent1"/>
+          </a:lnRef>
+          <a:fillRef idx="3">
+            <a:schemeClr val="accent1"/>
+          </a:fillRef>
+          <a:effectRef idx="2">
+            <a:schemeClr val="accent1"/>
+          </a:effectRef>
+          <a:fontRef idx="minor">
+            <a:schemeClr val="lt1"/>
+          </a:fontRef>
+        </p:style>
+        <p:txBody>
+          <a:bodyPr rtlCol="0" anchor="ctr"/>
+          <a:lstStyle/>
+          <a:p>
+            <a:pPr algn="ctr"/>
+          </a:p>
+        </p:txBody>
+      </p:sp>
+      <p:sp>
+        <p:nvSpPr>
+          <p:cNvPr id="22" name="TextBox 21"/>
+          <p:cNvSpPr txBox="1"/>
+          <p:nvPr/>
+        </p:nvSpPr>
+        <p:spPr>
+          <a:xfrm>
+            <a:off x="500000" y="6540000"/>
+            <a:ext cx="7000000" cy="300000"/>
+          </a:xfrm>
+          <a:prstGeom prst="rect">
+            <a:avLst/>
+          </a:prstGeom>
+          <a:noFill/>
+        </p:spPr>
+        <p:txBody>
+          <a:bodyPr wrap="square" anchor="t">
+            <a:spAutoFit/>
+          </a:bodyPr>
+          <a:lstStyle/>
+          <a:p>
+            <a:pPr algn="l">
+              <a:lnSpc>
+                <a:spcPct val="110000"/>
+              </a:lnSpc>
+              <a:spcAft>
+                <a:spcPts val="600"/>
+              </a:spcAft>
+            </a:pPr>
+            <a:r>
+              <a:rPr sz="1000" b="0">
+                <a:solidFill>
+                  <a:srgbClr val="8A97B5"/>
+                </a:solidFill>
+                <a:latin typeface="微软雅黑" panose="020B0502040204020203" charset="-122"/>
+              </a:rPr>
+              <a:t>两江智造集团 · Python程序设计（项目实战）</a:t>
+            </a:r>
+            <a:endParaRPr sz="1000" b="0">
+              <a:solidFill>
+                <a:srgbClr val="8A97B5"/>
+              </a:solidFill>
+              <a:latin typeface="微软雅黑" panose="020B0502040204020203" charset="-122"/>
+            </a:endParaRPr>
+          </a:p>
+        </p:txBody>
+      </p:sp>
+      <p:sp>
+        <p:nvSpPr>
+          <p:cNvPr id="23" name="TextBox 22"/>
+          <p:cNvSpPr txBox="1"/>
+          <p:nvPr/>
+        </p:nvSpPr>
+        <p:spPr>
+          <a:xfrm>
+            <a:off x="10600000" y="6540000"/>
+            <a:ext cx="1000000" cy="300000"/>
+          </a:xfrm>
+          <a:prstGeom prst="rect">
+            <a:avLst/>
+          </a:prstGeom>
+          <a:noFill/>
+        </p:spPr>
+        <p:txBody>
+          <a:bodyPr wrap="square" anchor="t">
+            <a:spAutoFit/>
+          </a:bodyPr>
+          <a:lstStyle/>
+          <a:p>
+            <a:pPr algn="r">
+              <a:lnSpc>
+                <a:spcPct val="110000"/>
+              </a:lnSpc>
+              <a:spcAft>
+                <a:spcPts val="600"/>
+              </a:spcAft>
+            </a:pPr>
+            <a:r>
+              <a:rPr sz="1000" b="0">
+                <a:solidFill>
+                  <a:srgbClr val="8A97B5"/>
+                </a:solidFill>
+                <a:latin typeface="微软雅黑"/>
+              </a:rPr>
+              <a:t>33 / 63</a:t>
+            </a:r>
+            <a:endParaRPr sz="1000" b="0">
+              <a:solidFill>
+                <a:srgbClr val="8A97B5"/>
+              </a:solidFill>
+              <a:latin typeface="微软雅黑" panose="020B0502040204020203" charset="-122"/>
+            </a:endParaRPr>
+          </a:p>
+        </p:txBody>
+      </p:sp>
+    </p:spTree>
+  </p:cSld>
+  <p:clrMapOvr>
+    <a:masterClrMapping/>
+  </p:clrMapOvr>
+</p:sld>
+</file>
+
 <file path=ppt/slides/slide7.xml><?xml version="1.0" encoding="utf-8"?>
 <p:sld xmlns:a="http://schemas.openxmlformats.org/drawingml/2006/main" xmlns:p="http://schemas.openxmlformats.org/presentationml/2006/main" xmlns:r="http://schemas.openxmlformats.org/officeDocument/2006/relationships">
   <p:cSld>
@@ -57887,7 +60733,7 @@
                 </a:solidFill>
                 <a:latin typeface="微软雅黑"/>
               </a:rPr>
-              <a:t>7 / 60</a:t>
+              <a:t>7 / 63</a:t>
             </a:r>
           </a:p>
         </p:txBody>
@@ -58742,7 +61588,7 @@
                 </a:solidFill>
                 <a:latin typeface="微软雅黑"/>
               </a:rPr>
-              <a:t>8 / 60</a:t>
+              <a:t>8 / 63</a:t>
             </a:r>
           </a:p>
         </p:txBody>
@@ -60344,7 +63190,7 @@
                 </a:solidFill>
                 <a:latin typeface="微软雅黑"/>
               </a:rPr>
-              <a:t>9 / 60</a:t>
+              <a:t>9 / 63</a:t>
             </a:r>
           </a:p>
         </p:txBody>
